--- a/Presentation.pptx
+++ b/Presentation.pptx
@@ -4,6 +4,9 @@
   <p:sldMasterIdLst>
     <p:sldMasterId id="2147483660" r:id="rId1"/>
   </p:sldMasterIdLst>
+  <p:notesMasterIdLst>
+    <p:notesMasterId r:id="rId23"/>
+  </p:notesMasterIdLst>
   <p:sldIdLst>
     <p:sldId id="256" r:id="rId2"/>
     <p:sldId id="258" r:id="rId3"/>
@@ -22,9 +25,10 @@
     <p:sldId id="274" r:id="rId16"/>
     <p:sldId id="273" r:id="rId17"/>
     <p:sldId id="271" r:id="rId18"/>
-    <p:sldId id="275" r:id="rId19"/>
-    <p:sldId id="272" r:id="rId20"/>
-    <p:sldId id="257" r:id="rId21"/>
+    <p:sldId id="276" r:id="rId19"/>
+    <p:sldId id="275" r:id="rId20"/>
+    <p:sldId id="272" r:id="rId21"/>
+    <p:sldId id="257" r:id="rId22"/>
   </p:sldIdLst>
   <p:sldSz cx="12192000" cy="6858000"/>
   <p:notesSz cx="6858000" cy="9144000"/>
@@ -131,6 +135,2103 @@
 </p:presentation>
 </file>
 
+<file path=ppt/notesMasters/notesMaster1.xml><?xml version="1.0" encoding="utf-8"?>
+<p:notesMaster xmlns:a="http://schemas.openxmlformats.org/drawingml/2006/main" xmlns:r="http://schemas.openxmlformats.org/officeDocument/2006/relationships" xmlns:p="http://schemas.openxmlformats.org/presentationml/2006/main">
+  <p:cSld>
+    <p:bg>
+      <p:bgRef idx="1001">
+        <a:schemeClr val="bg1"/>
+      </p:bgRef>
+    </p:bg>
+    <p:spTree>
+      <p:nvGrpSpPr>
+        <p:cNvPr id="1" name=""/>
+        <p:cNvGrpSpPr/>
+        <p:nvPr/>
+      </p:nvGrpSpPr>
+      <p:grpSpPr>
+        <a:xfrm>
+          <a:off x="0" y="0"/>
+          <a:ext cx="0" cy="0"/>
+          <a:chOff x="0" y="0"/>
+          <a:chExt cx="0" cy="0"/>
+        </a:xfrm>
+      </p:grpSpPr>
+      <p:sp>
+        <p:nvSpPr>
+          <p:cNvPr id="2" name="Élőfej helye 1"/>
+          <p:cNvSpPr>
+            <a:spLocks noGrp="1"/>
+          </p:cNvSpPr>
+          <p:nvPr>
+            <p:ph type="hdr" sz="quarter"/>
+          </p:nvPr>
+        </p:nvSpPr>
+        <p:spPr>
+          <a:xfrm>
+            <a:off x="0" y="0"/>
+            <a:ext cx="2971800" cy="458788"/>
+          </a:xfrm>
+          <a:prstGeom prst="rect">
+            <a:avLst/>
+          </a:prstGeom>
+        </p:spPr>
+        <p:txBody>
+          <a:bodyPr vert="horz" lIns="91440" tIns="45720" rIns="91440" bIns="45720" rtlCol="0"/>
+          <a:lstStyle>
+            <a:lvl1pPr algn="l">
+              <a:defRPr sz="1200"/>
+            </a:lvl1pPr>
+          </a:lstStyle>
+          <a:p>
+            <a:endParaRPr lang="hu-HU"/>
+          </a:p>
+        </p:txBody>
+      </p:sp>
+      <p:sp>
+        <p:nvSpPr>
+          <p:cNvPr id="3" name="Dátum helye 2"/>
+          <p:cNvSpPr>
+            <a:spLocks noGrp="1"/>
+          </p:cNvSpPr>
+          <p:nvPr>
+            <p:ph type="dt" idx="1"/>
+          </p:nvPr>
+        </p:nvSpPr>
+        <p:spPr>
+          <a:xfrm>
+            <a:off x="3884613" y="0"/>
+            <a:ext cx="2971800" cy="458788"/>
+          </a:xfrm>
+          <a:prstGeom prst="rect">
+            <a:avLst/>
+          </a:prstGeom>
+        </p:spPr>
+        <p:txBody>
+          <a:bodyPr vert="horz" lIns="91440" tIns="45720" rIns="91440" bIns="45720" rtlCol="0"/>
+          <a:lstStyle>
+            <a:lvl1pPr algn="r">
+              <a:defRPr sz="1200"/>
+            </a:lvl1pPr>
+          </a:lstStyle>
+          <a:p>
+            <a:fld id="{C015170A-2158-4A8A-8DC6-5F66235307F3}" type="datetimeFigureOut">
+              <a:rPr lang="hu-HU" smtClean="0"/>
+              <a:t>2026. 02. 17.</a:t>
+            </a:fld>
+            <a:endParaRPr lang="hu-HU"/>
+          </a:p>
+        </p:txBody>
+      </p:sp>
+      <p:sp>
+        <p:nvSpPr>
+          <p:cNvPr id="4" name="Diakép helye 3"/>
+          <p:cNvSpPr>
+            <a:spLocks noGrp="1" noRot="1" noChangeAspect="1"/>
+          </p:cNvSpPr>
+          <p:nvPr>
+            <p:ph type="sldImg" idx="2"/>
+          </p:nvPr>
+        </p:nvSpPr>
+        <p:spPr>
+          <a:xfrm>
+            <a:off x="685800" y="1143000"/>
+            <a:ext cx="5486400" cy="3086100"/>
+          </a:xfrm>
+          <a:prstGeom prst="rect">
+            <a:avLst/>
+          </a:prstGeom>
+          <a:noFill/>
+          <a:ln w="12700">
+            <a:solidFill>
+              <a:prstClr val="black"/>
+            </a:solidFill>
+          </a:ln>
+        </p:spPr>
+        <p:txBody>
+          <a:bodyPr vert="horz" lIns="91440" tIns="45720" rIns="91440" bIns="45720" rtlCol="0" anchor="ctr"/>
+          <a:lstStyle/>
+          <a:p>
+            <a:endParaRPr lang="hu-HU"/>
+          </a:p>
+        </p:txBody>
+      </p:sp>
+      <p:sp>
+        <p:nvSpPr>
+          <p:cNvPr id="5" name="Jegyzetek helye 4"/>
+          <p:cNvSpPr>
+            <a:spLocks noGrp="1"/>
+          </p:cNvSpPr>
+          <p:nvPr>
+            <p:ph type="body" sz="quarter" idx="3"/>
+          </p:nvPr>
+        </p:nvSpPr>
+        <p:spPr>
+          <a:xfrm>
+            <a:off x="685800" y="4400550"/>
+            <a:ext cx="5486400" cy="3600450"/>
+          </a:xfrm>
+          <a:prstGeom prst="rect">
+            <a:avLst/>
+          </a:prstGeom>
+        </p:spPr>
+        <p:txBody>
+          <a:bodyPr vert="horz" lIns="91440" tIns="45720" rIns="91440" bIns="45720" rtlCol="0"/>
+          <a:lstStyle/>
+          <a:p>
+            <a:pPr lvl="0"/>
+            <a:r>
+              <a:rPr lang="hu-HU"/>
+              <a:t>Mintaszöveg szerkesztése</a:t>
+            </a:r>
+          </a:p>
+          <a:p>
+            <a:pPr lvl="1"/>
+            <a:r>
+              <a:rPr lang="hu-HU"/>
+              <a:t>Második szint</a:t>
+            </a:r>
+          </a:p>
+          <a:p>
+            <a:pPr lvl="2"/>
+            <a:r>
+              <a:rPr lang="hu-HU"/>
+              <a:t>Harmadik szint</a:t>
+            </a:r>
+          </a:p>
+          <a:p>
+            <a:pPr lvl="3"/>
+            <a:r>
+              <a:rPr lang="hu-HU"/>
+              <a:t>Negyedik szint</a:t>
+            </a:r>
+          </a:p>
+          <a:p>
+            <a:pPr lvl="4"/>
+            <a:r>
+              <a:rPr lang="hu-HU"/>
+              <a:t>Ötödik szint</a:t>
+            </a:r>
+          </a:p>
+        </p:txBody>
+      </p:sp>
+      <p:sp>
+        <p:nvSpPr>
+          <p:cNvPr id="6" name="Élőláb helye 5"/>
+          <p:cNvSpPr>
+            <a:spLocks noGrp="1"/>
+          </p:cNvSpPr>
+          <p:nvPr>
+            <p:ph type="ftr" sz="quarter" idx="4"/>
+          </p:nvPr>
+        </p:nvSpPr>
+        <p:spPr>
+          <a:xfrm>
+            <a:off x="0" y="8685213"/>
+            <a:ext cx="2971800" cy="458787"/>
+          </a:xfrm>
+          <a:prstGeom prst="rect">
+            <a:avLst/>
+          </a:prstGeom>
+        </p:spPr>
+        <p:txBody>
+          <a:bodyPr vert="horz" lIns="91440" tIns="45720" rIns="91440" bIns="45720" rtlCol="0" anchor="b"/>
+          <a:lstStyle>
+            <a:lvl1pPr algn="l">
+              <a:defRPr sz="1200"/>
+            </a:lvl1pPr>
+          </a:lstStyle>
+          <a:p>
+            <a:endParaRPr lang="hu-HU"/>
+          </a:p>
+        </p:txBody>
+      </p:sp>
+      <p:sp>
+        <p:nvSpPr>
+          <p:cNvPr id="7" name="Dia számának helye 6"/>
+          <p:cNvSpPr>
+            <a:spLocks noGrp="1"/>
+          </p:cNvSpPr>
+          <p:nvPr>
+            <p:ph type="sldNum" sz="quarter" idx="5"/>
+          </p:nvPr>
+        </p:nvSpPr>
+        <p:spPr>
+          <a:xfrm>
+            <a:off x="3884613" y="8685213"/>
+            <a:ext cx="2971800" cy="458787"/>
+          </a:xfrm>
+          <a:prstGeom prst="rect">
+            <a:avLst/>
+          </a:prstGeom>
+        </p:spPr>
+        <p:txBody>
+          <a:bodyPr vert="horz" lIns="91440" tIns="45720" rIns="91440" bIns="45720" rtlCol="0" anchor="b"/>
+          <a:lstStyle>
+            <a:lvl1pPr algn="r">
+              <a:defRPr sz="1200"/>
+            </a:lvl1pPr>
+          </a:lstStyle>
+          <a:p>
+            <a:fld id="{13C8DE43-8A86-4C0A-AAE9-F0A77234DDB0}" type="slidenum">
+              <a:rPr lang="hu-HU" smtClean="0"/>
+              <a:t>‹#›</a:t>
+            </a:fld>
+            <a:endParaRPr lang="hu-HU"/>
+          </a:p>
+        </p:txBody>
+      </p:sp>
+    </p:spTree>
+    <p:extLst>
+      <p:ext uri="{BB962C8B-B14F-4D97-AF65-F5344CB8AC3E}">
+        <p14:creationId xmlns:p14="http://schemas.microsoft.com/office/powerpoint/2010/main" val="4132734011"/>
+      </p:ext>
+    </p:extLst>
+  </p:cSld>
+  <p:clrMap bg1="lt1" tx1="dk1" bg2="lt2" tx2="dk2" accent1="accent1" accent2="accent2" accent3="accent3" accent4="accent4" accent5="accent5" accent6="accent6" hlink="hlink" folHlink="folHlink"/>
+  <p:notesStyle>
+    <a:lvl1pPr marL="0" algn="l" defTabSz="914400" rtl="0" eaLnBrk="1" latinLnBrk="0" hangingPunct="1">
+      <a:defRPr sz="1200" kern="1200">
+        <a:solidFill>
+          <a:schemeClr val="tx1"/>
+        </a:solidFill>
+        <a:latin typeface="+mn-lt"/>
+        <a:ea typeface="+mn-ea"/>
+        <a:cs typeface="+mn-cs"/>
+      </a:defRPr>
+    </a:lvl1pPr>
+    <a:lvl2pPr marL="457200" algn="l" defTabSz="914400" rtl="0" eaLnBrk="1" latinLnBrk="0" hangingPunct="1">
+      <a:defRPr sz="1200" kern="1200">
+        <a:solidFill>
+          <a:schemeClr val="tx1"/>
+        </a:solidFill>
+        <a:latin typeface="+mn-lt"/>
+        <a:ea typeface="+mn-ea"/>
+        <a:cs typeface="+mn-cs"/>
+      </a:defRPr>
+    </a:lvl2pPr>
+    <a:lvl3pPr marL="914400" algn="l" defTabSz="914400" rtl="0" eaLnBrk="1" latinLnBrk="0" hangingPunct="1">
+      <a:defRPr sz="1200" kern="1200">
+        <a:solidFill>
+          <a:schemeClr val="tx1"/>
+        </a:solidFill>
+        <a:latin typeface="+mn-lt"/>
+        <a:ea typeface="+mn-ea"/>
+        <a:cs typeface="+mn-cs"/>
+      </a:defRPr>
+    </a:lvl3pPr>
+    <a:lvl4pPr marL="1371600" algn="l" defTabSz="914400" rtl="0" eaLnBrk="1" latinLnBrk="0" hangingPunct="1">
+      <a:defRPr sz="1200" kern="1200">
+        <a:solidFill>
+          <a:schemeClr val="tx1"/>
+        </a:solidFill>
+        <a:latin typeface="+mn-lt"/>
+        <a:ea typeface="+mn-ea"/>
+        <a:cs typeface="+mn-cs"/>
+      </a:defRPr>
+    </a:lvl4pPr>
+    <a:lvl5pPr marL="1828800" algn="l" defTabSz="914400" rtl="0" eaLnBrk="1" latinLnBrk="0" hangingPunct="1">
+      <a:defRPr sz="1200" kern="1200">
+        <a:solidFill>
+          <a:schemeClr val="tx1"/>
+        </a:solidFill>
+        <a:latin typeface="+mn-lt"/>
+        <a:ea typeface="+mn-ea"/>
+        <a:cs typeface="+mn-cs"/>
+      </a:defRPr>
+    </a:lvl5pPr>
+    <a:lvl6pPr marL="2286000" algn="l" defTabSz="914400" rtl="0" eaLnBrk="1" latinLnBrk="0" hangingPunct="1">
+      <a:defRPr sz="1200" kern="1200">
+        <a:solidFill>
+          <a:schemeClr val="tx1"/>
+        </a:solidFill>
+        <a:latin typeface="+mn-lt"/>
+        <a:ea typeface="+mn-ea"/>
+        <a:cs typeface="+mn-cs"/>
+      </a:defRPr>
+    </a:lvl6pPr>
+    <a:lvl7pPr marL="2743200" algn="l" defTabSz="914400" rtl="0" eaLnBrk="1" latinLnBrk="0" hangingPunct="1">
+      <a:defRPr sz="1200" kern="1200">
+        <a:solidFill>
+          <a:schemeClr val="tx1"/>
+        </a:solidFill>
+        <a:latin typeface="+mn-lt"/>
+        <a:ea typeface="+mn-ea"/>
+        <a:cs typeface="+mn-cs"/>
+      </a:defRPr>
+    </a:lvl7pPr>
+    <a:lvl8pPr marL="3200400" algn="l" defTabSz="914400" rtl="0" eaLnBrk="1" latinLnBrk="0" hangingPunct="1">
+      <a:defRPr sz="1200" kern="1200">
+        <a:solidFill>
+          <a:schemeClr val="tx1"/>
+        </a:solidFill>
+        <a:latin typeface="+mn-lt"/>
+        <a:ea typeface="+mn-ea"/>
+        <a:cs typeface="+mn-cs"/>
+      </a:defRPr>
+    </a:lvl8pPr>
+    <a:lvl9pPr marL="3657600" algn="l" defTabSz="914400" rtl="0" eaLnBrk="1" latinLnBrk="0" hangingPunct="1">
+      <a:defRPr sz="1200" kern="1200">
+        <a:solidFill>
+          <a:schemeClr val="tx1"/>
+        </a:solidFill>
+        <a:latin typeface="+mn-lt"/>
+        <a:ea typeface="+mn-ea"/>
+        <a:cs typeface="+mn-cs"/>
+      </a:defRPr>
+    </a:lvl9pPr>
+  </p:notesStyle>
+</p:notesMaster>
+</file>
+
+<file path=ppt/notesSlides/notesSlide1.xml><?xml version="1.0" encoding="utf-8"?>
+<p:notes xmlns:a="http://schemas.openxmlformats.org/drawingml/2006/main" xmlns:r="http://schemas.openxmlformats.org/officeDocument/2006/relationships" xmlns:p="http://schemas.openxmlformats.org/presentationml/2006/main">
+  <p:cSld>
+    <p:spTree>
+      <p:nvGrpSpPr>
+        <p:cNvPr id="1" name=""/>
+        <p:cNvGrpSpPr/>
+        <p:nvPr/>
+      </p:nvGrpSpPr>
+      <p:grpSpPr>
+        <a:xfrm>
+          <a:off x="0" y="0"/>
+          <a:ext cx="0" cy="0"/>
+          <a:chOff x="0" y="0"/>
+          <a:chExt cx="0" cy="0"/>
+        </a:xfrm>
+      </p:grpSpPr>
+      <p:sp>
+        <p:nvSpPr>
+          <p:cNvPr id="2" name="Diakép helye 1"/>
+          <p:cNvSpPr>
+            <a:spLocks noGrp="1" noRot="1" noChangeAspect="1"/>
+          </p:cNvSpPr>
+          <p:nvPr>
+            <p:ph type="sldImg"/>
+          </p:nvPr>
+        </p:nvSpPr>
+        <p:spPr/>
+      </p:sp>
+      <p:sp>
+        <p:nvSpPr>
+          <p:cNvPr id="3" name="Jegyzetek helye 2"/>
+          <p:cNvSpPr>
+            <a:spLocks noGrp="1"/>
+          </p:cNvSpPr>
+          <p:nvPr>
+            <p:ph type="body" idx="1"/>
+          </p:nvPr>
+        </p:nvSpPr>
+        <p:spPr/>
+        <p:txBody>
+          <a:bodyPr/>
+          <a:lstStyle/>
+          <a:p>
+            <a:r>
+              <a:rPr lang="hu-HU" dirty="0"/>
+              <a:t>1-2 MARCI</a:t>
+            </a:r>
+            <a:br>
+              <a:rPr lang="hu-HU" dirty="0"/>
+            </a:br>
+            <a:r>
+              <a:rPr lang="hu-HU" dirty="0"/>
+              <a:t>3-4 PATRIK</a:t>
+            </a:r>
+          </a:p>
+        </p:txBody>
+      </p:sp>
+      <p:sp>
+        <p:nvSpPr>
+          <p:cNvPr id="4" name="Dia számának helye 3"/>
+          <p:cNvSpPr>
+            <a:spLocks noGrp="1"/>
+          </p:cNvSpPr>
+          <p:nvPr>
+            <p:ph type="sldNum" sz="quarter" idx="5"/>
+          </p:nvPr>
+        </p:nvSpPr>
+        <p:spPr/>
+        <p:txBody>
+          <a:bodyPr/>
+          <a:lstStyle/>
+          <a:p>
+            <a:fld id="{13C8DE43-8A86-4C0A-AAE9-F0A77234DDB0}" type="slidenum">
+              <a:rPr lang="hu-HU" smtClean="0"/>
+              <a:t>2</a:t>
+            </a:fld>
+            <a:endParaRPr lang="hu-HU"/>
+          </a:p>
+        </p:txBody>
+      </p:sp>
+    </p:spTree>
+    <p:extLst>
+      <p:ext uri="{BB962C8B-B14F-4D97-AF65-F5344CB8AC3E}">
+        <p14:creationId xmlns:p14="http://schemas.microsoft.com/office/powerpoint/2010/main" val="2041195436"/>
+      </p:ext>
+    </p:extLst>
+  </p:cSld>
+  <p:clrMapOvr>
+    <a:masterClrMapping/>
+  </p:clrMapOvr>
+</p:notes>
+</file>
+
+<file path=ppt/notesSlides/notesSlide10.xml><?xml version="1.0" encoding="utf-8"?>
+<p:notes xmlns:a="http://schemas.openxmlformats.org/drawingml/2006/main" xmlns:r="http://schemas.openxmlformats.org/officeDocument/2006/relationships" xmlns:p="http://schemas.openxmlformats.org/presentationml/2006/main">
+  <p:cSld>
+    <p:spTree>
+      <p:nvGrpSpPr>
+        <p:cNvPr id="1" name=""/>
+        <p:cNvGrpSpPr/>
+        <p:nvPr/>
+      </p:nvGrpSpPr>
+      <p:grpSpPr>
+        <a:xfrm>
+          <a:off x="0" y="0"/>
+          <a:ext cx="0" cy="0"/>
+          <a:chOff x="0" y="0"/>
+          <a:chExt cx="0" cy="0"/>
+        </a:xfrm>
+      </p:grpSpPr>
+      <p:sp>
+        <p:nvSpPr>
+          <p:cNvPr id="2" name="Diakép helye 1"/>
+          <p:cNvSpPr>
+            <a:spLocks noGrp="1" noRot="1" noChangeAspect="1"/>
+          </p:cNvSpPr>
+          <p:nvPr>
+            <p:ph type="sldImg"/>
+          </p:nvPr>
+        </p:nvSpPr>
+        <p:spPr/>
+      </p:sp>
+      <p:sp>
+        <p:nvSpPr>
+          <p:cNvPr id="3" name="Jegyzetek helye 2"/>
+          <p:cNvSpPr>
+            <a:spLocks noGrp="1"/>
+          </p:cNvSpPr>
+          <p:nvPr>
+            <p:ph type="body" idx="1"/>
+          </p:nvPr>
+        </p:nvSpPr>
+        <p:spPr/>
+        <p:txBody>
+          <a:bodyPr/>
+          <a:lstStyle/>
+          <a:p>
+            <a:r>
+              <a:rPr lang="hu-HU" b="1" dirty="0"/>
+              <a:t>MARCI</a:t>
+            </a:r>
+          </a:p>
+          <a:p>
+            <a:r>
+              <a:rPr lang="en-US" b="1" dirty="0"/>
+              <a:t>Static NAT (One-to-One)</a:t>
+            </a:r>
+            <a:r>
+              <a:rPr lang="en-US" dirty="0"/>
+              <a:t>: Maps a private internal IP address to a public external IP address.</a:t>
+            </a:r>
+            <a:endParaRPr lang="hu-HU" dirty="0"/>
+          </a:p>
+        </p:txBody>
+      </p:sp>
+      <p:sp>
+        <p:nvSpPr>
+          <p:cNvPr id="4" name="Dia számának helye 3"/>
+          <p:cNvSpPr>
+            <a:spLocks noGrp="1"/>
+          </p:cNvSpPr>
+          <p:nvPr>
+            <p:ph type="sldNum" sz="quarter" idx="5"/>
+          </p:nvPr>
+        </p:nvSpPr>
+        <p:spPr/>
+        <p:txBody>
+          <a:bodyPr/>
+          <a:lstStyle/>
+          <a:p>
+            <a:fld id="{13C8DE43-8A86-4C0A-AAE9-F0A77234DDB0}" type="slidenum">
+              <a:rPr lang="hu-HU" smtClean="0"/>
+              <a:t>11</a:t>
+            </a:fld>
+            <a:endParaRPr lang="hu-HU"/>
+          </a:p>
+        </p:txBody>
+      </p:sp>
+    </p:spTree>
+    <p:extLst>
+      <p:ext uri="{BB962C8B-B14F-4D97-AF65-F5344CB8AC3E}">
+        <p14:creationId xmlns:p14="http://schemas.microsoft.com/office/powerpoint/2010/main" val="3128075029"/>
+      </p:ext>
+    </p:extLst>
+  </p:cSld>
+  <p:clrMapOvr>
+    <a:masterClrMapping/>
+  </p:clrMapOvr>
+</p:notes>
+</file>
+
+<file path=ppt/notesSlides/notesSlide11.xml><?xml version="1.0" encoding="utf-8"?>
+<p:notes xmlns:a="http://schemas.openxmlformats.org/drawingml/2006/main" xmlns:r="http://schemas.openxmlformats.org/officeDocument/2006/relationships" xmlns:p="http://schemas.openxmlformats.org/presentationml/2006/main">
+  <p:cSld>
+    <p:spTree>
+      <p:nvGrpSpPr>
+        <p:cNvPr id="1" name=""/>
+        <p:cNvGrpSpPr/>
+        <p:nvPr/>
+      </p:nvGrpSpPr>
+      <p:grpSpPr>
+        <a:xfrm>
+          <a:off x="0" y="0"/>
+          <a:ext cx="0" cy="0"/>
+          <a:chOff x="0" y="0"/>
+          <a:chExt cx="0" cy="0"/>
+        </a:xfrm>
+      </p:grpSpPr>
+      <p:sp>
+        <p:nvSpPr>
+          <p:cNvPr id="2" name="Diakép helye 1"/>
+          <p:cNvSpPr>
+            <a:spLocks noGrp="1" noRot="1" noChangeAspect="1"/>
+          </p:cNvSpPr>
+          <p:nvPr>
+            <p:ph type="sldImg"/>
+          </p:nvPr>
+        </p:nvSpPr>
+        <p:spPr/>
+      </p:sp>
+      <p:sp>
+        <p:nvSpPr>
+          <p:cNvPr id="3" name="Jegyzetek helye 2"/>
+          <p:cNvSpPr>
+            <a:spLocks noGrp="1"/>
+          </p:cNvSpPr>
+          <p:nvPr>
+            <p:ph type="body" idx="1"/>
+          </p:nvPr>
+        </p:nvSpPr>
+        <p:spPr/>
+        <p:txBody>
+          <a:bodyPr/>
+          <a:lstStyle/>
+          <a:p>
+            <a:r>
+              <a:rPr lang="hu-HU" dirty="0"/>
+              <a:t>MARCI</a:t>
+            </a:r>
+            <a:br>
+              <a:rPr lang="hu-HU" dirty="0"/>
+            </a:br>
+            <a:r>
+              <a:rPr lang="en-US" dirty="0"/>
+              <a:t>Many-to-one address translation for internal hosts.</a:t>
+            </a:r>
+          </a:p>
+          <a:p>
+            <a:r>
+              <a:rPr lang="en-US" dirty="0"/>
+              <a:t>Multiple private IPs share a single public IP address.</a:t>
+            </a:r>
+          </a:p>
+          <a:p>
+            <a:endParaRPr lang="hu-HU" dirty="0"/>
+          </a:p>
+        </p:txBody>
+      </p:sp>
+      <p:sp>
+        <p:nvSpPr>
+          <p:cNvPr id="4" name="Dia számának helye 3"/>
+          <p:cNvSpPr>
+            <a:spLocks noGrp="1"/>
+          </p:cNvSpPr>
+          <p:nvPr>
+            <p:ph type="sldNum" sz="quarter" idx="5"/>
+          </p:nvPr>
+        </p:nvSpPr>
+        <p:spPr/>
+        <p:txBody>
+          <a:bodyPr/>
+          <a:lstStyle/>
+          <a:p>
+            <a:fld id="{13C8DE43-8A86-4C0A-AAE9-F0A77234DDB0}" type="slidenum">
+              <a:rPr lang="hu-HU" smtClean="0"/>
+              <a:t>12</a:t>
+            </a:fld>
+            <a:endParaRPr lang="hu-HU"/>
+          </a:p>
+        </p:txBody>
+      </p:sp>
+    </p:spTree>
+    <p:extLst>
+      <p:ext uri="{BB962C8B-B14F-4D97-AF65-F5344CB8AC3E}">
+        <p14:creationId xmlns:p14="http://schemas.microsoft.com/office/powerpoint/2010/main" val="4288426036"/>
+      </p:ext>
+    </p:extLst>
+  </p:cSld>
+  <p:clrMapOvr>
+    <a:masterClrMapping/>
+  </p:clrMapOvr>
+</p:notes>
+</file>
+
+<file path=ppt/notesSlides/notesSlide12.xml><?xml version="1.0" encoding="utf-8"?>
+<p:notes xmlns:a="http://schemas.openxmlformats.org/drawingml/2006/main" xmlns:r="http://schemas.openxmlformats.org/officeDocument/2006/relationships" xmlns:p="http://schemas.openxmlformats.org/presentationml/2006/main">
+  <p:cSld>
+    <p:spTree>
+      <p:nvGrpSpPr>
+        <p:cNvPr id="1" name=""/>
+        <p:cNvGrpSpPr/>
+        <p:nvPr/>
+      </p:nvGrpSpPr>
+      <p:grpSpPr>
+        <a:xfrm>
+          <a:off x="0" y="0"/>
+          <a:ext cx="0" cy="0"/>
+          <a:chOff x="0" y="0"/>
+          <a:chExt cx="0" cy="0"/>
+        </a:xfrm>
+      </p:grpSpPr>
+      <p:sp>
+        <p:nvSpPr>
+          <p:cNvPr id="2" name="Diakép helye 1"/>
+          <p:cNvSpPr>
+            <a:spLocks noGrp="1" noRot="1" noChangeAspect="1"/>
+          </p:cNvSpPr>
+          <p:nvPr>
+            <p:ph type="sldImg"/>
+          </p:nvPr>
+        </p:nvSpPr>
+        <p:spPr/>
+      </p:sp>
+      <p:sp>
+        <p:nvSpPr>
+          <p:cNvPr id="3" name="Jegyzetek helye 2"/>
+          <p:cNvSpPr>
+            <a:spLocks noGrp="1"/>
+          </p:cNvSpPr>
+          <p:nvPr>
+            <p:ph type="body" idx="1"/>
+          </p:nvPr>
+        </p:nvSpPr>
+        <p:spPr/>
+        <p:txBody>
+          <a:bodyPr/>
+          <a:lstStyle/>
+          <a:p>
+            <a:r>
+              <a:rPr lang="hu-HU" dirty="0"/>
+              <a:t>PATRIK</a:t>
+            </a:r>
+          </a:p>
+        </p:txBody>
+      </p:sp>
+      <p:sp>
+        <p:nvSpPr>
+          <p:cNvPr id="4" name="Dia számának helye 3"/>
+          <p:cNvSpPr>
+            <a:spLocks noGrp="1"/>
+          </p:cNvSpPr>
+          <p:nvPr>
+            <p:ph type="sldNum" sz="quarter" idx="5"/>
+          </p:nvPr>
+        </p:nvSpPr>
+        <p:spPr/>
+        <p:txBody>
+          <a:bodyPr/>
+          <a:lstStyle/>
+          <a:p>
+            <a:fld id="{13C8DE43-8A86-4C0A-AAE9-F0A77234DDB0}" type="slidenum">
+              <a:rPr lang="hu-HU" smtClean="0"/>
+              <a:t>13</a:t>
+            </a:fld>
+            <a:endParaRPr lang="hu-HU"/>
+          </a:p>
+        </p:txBody>
+      </p:sp>
+    </p:spTree>
+    <p:extLst>
+      <p:ext uri="{BB962C8B-B14F-4D97-AF65-F5344CB8AC3E}">
+        <p14:creationId xmlns:p14="http://schemas.microsoft.com/office/powerpoint/2010/main" val="2357859418"/>
+      </p:ext>
+    </p:extLst>
+  </p:cSld>
+  <p:clrMapOvr>
+    <a:masterClrMapping/>
+  </p:clrMapOvr>
+</p:notes>
+</file>
+
+<file path=ppt/notesSlides/notesSlide13.xml><?xml version="1.0" encoding="utf-8"?>
+<p:notes xmlns:a="http://schemas.openxmlformats.org/drawingml/2006/main" xmlns:r="http://schemas.openxmlformats.org/officeDocument/2006/relationships" xmlns:p="http://schemas.openxmlformats.org/presentationml/2006/main">
+  <p:cSld>
+    <p:spTree>
+      <p:nvGrpSpPr>
+        <p:cNvPr id="1" name=""/>
+        <p:cNvGrpSpPr/>
+        <p:nvPr/>
+      </p:nvGrpSpPr>
+      <p:grpSpPr>
+        <a:xfrm>
+          <a:off x="0" y="0"/>
+          <a:ext cx="0" cy="0"/>
+          <a:chOff x="0" y="0"/>
+          <a:chExt cx="0" cy="0"/>
+        </a:xfrm>
+      </p:grpSpPr>
+      <p:sp>
+        <p:nvSpPr>
+          <p:cNvPr id="2" name="Diakép helye 1"/>
+          <p:cNvSpPr>
+            <a:spLocks noGrp="1" noRot="1" noChangeAspect="1"/>
+          </p:cNvSpPr>
+          <p:nvPr>
+            <p:ph type="sldImg"/>
+          </p:nvPr>
+        </p:nvSpPr>
+        <p:spPr/>
+      </p:sp>
+      <p:sp>
+        <p:nvSpPr>
+          <p:cNvPr id="3" name="Jegyzetek helye 2"/>
+          <p:cNvSpPr>
+            <a:spLocks noGrp="1"/>
+          </p:cNvSpPr>
+          <p:nvPr>
+            <p:ph type="body" idx="1"/>
+          </p:nvPr>
+        </p:nvSpPr>
+        <p:spPr/>
+        <p:txBody>
+          <a:bodyPr/>
+          <a:lstStyle/>
+          <a:p>
+            <a:r>
+              <a:rPr lang="hu-HU" dirty="0"/>
+              <a:t>MARCI</a:t>
+            </a:r>
+          </a:p>
+        </p:txBody>
+      </p:sp>
+      <p:sp>
+        <p:nvSpPr>
+          <p:cNvPr id="4" name="Dia számának helye 3"/>
+          <p:cNvSpPr>
+            <a:spLocks noGrp="1"/>
+          </p:cNvSpPr>
+          <p:nvPr>
+            <p:ph type="sldNum" sz="quarter" idx="5"/>
+          </p:nvPr>
+        </p:nvSpPr>
+        <p:spPr/>
+        <p:txBody>
+          <a:bodyPr/>
+          <a:lstStyle/>
+          <a:p>
+            <a:fld id="{13C8DE43-8A86-4C0A-AAE9-F0A77234DDB0}" type="slidenum">
+              <a:rPr lang="hu-HU" smtClean="0"/>
+              <a:t>14</a:t>
+            </a:fld>
+            <a:endParaRPr lang="hu-HU"/>
+          </a:p>
+        </p:txBody>
+      </p:sp>
+    </p:spTree>
+    <p:extLst>
+      <p:ext uri="{BB962C8B-B14F-4D97-AF65-F5344CB8AC3E}">
+        <p14:creationId xmlns:p14="http://schemas.microsoft.com/office/powerpoint/2010/main" val="892548559"/>
+      </p:ext>
+    </p:extLst>
+  </p:cSld>
+  <p:clrMapOvr>
+    <a:masterClrMapping/>
+  </p:clrMapOvr>
+</p:notes>
+</file>
+
+<file path=ppt/notesSlides/notesSlide14.xml><?xml version="1.0" encoding="utf-8"?>
+<p:notes xmlns:a="http://schemas.openxmlformats.org/drawingml/2006/main" xmlns:r="http://schemas.openxmlformats.org/officeDocument/2006/relationships" xmlns:p="http://schemas.openxmlformats.org/presentationml/2006/main">
+  <p:cSld>
+    <p:spTree>
+      <p:nvGrpSpPr>
+        <p:cNvPr id="1" name=""/>
+        <p:cNvGrpSpPr/>
+        <p:nvPr/>
+      </p:nvGrpSpPr>
+      <p:grpSpPr>
+        <a:xfrm>
+          <a:off x="0" y="0"/>
+          <a:ext cx="0" cy="0"/>
+          <a:chOff x="0" y="0"/>
+          <a:chExt cx="0" cy="0"/>
+        </a:xfrm>
+      </p:grpSpPr>
+      <p:sp>
+        <p:nvSpPr>
+          <p:cNvPr id="2" name="Diakép helye 1"/>
+          <p:cNvSpPr>
+            <a:spLocks noGrp="1" noRot="1" noChangeAspect="1"/>
+          </p:cNvSpPr>
+          <p:nvPr>
+            <p:ph type="sldImg"/>
+          </p:nvPr>
+        </p:nvSpPr>
+        <p:spPr/>
+      </p:sp>
+      <p:sp>
+        <p:nvSpPr>
+          <p:cNvPr id="3" name="Jegyzetek helye 2"/>
+          <p:cNvSpPr>
+            <a:spLocks noGrp="1"/>
+          </p:cNvSpPr>
+          <p:nvPr>
+            <p:ph type="body" idx="1"/>
+          </p:nvPr>
+        </p:nvSpPr>
+        <p:spPr/>
+        <p:txBody>
+          <a:bodyPr/>
+          <a:lstStyle/>
+          <a:p>
+            <a:r>
+              <a:rPr lang="hu-HU" dirty="0"/>
+              <a:t>PATRIK</a:t>
+            </a:r>
+          </a:p>
+          <a:p>
+            <a:r>
+              <a:rPr lang="en-US" dirty="0"/>
+              <a:t>This segment represents the Internet Service Provider's network.</a:t>
+            </a:r>
+          </a:p>
+          <a:p>
+            <a:r>
+              <a:rPr lang="en-US" dirty="0"/>
+              <a:t>Used to provide a fixed path for traffic between the internal network and the ISP server.</a:t>
+            </a:r>
+          </a:p>
+          <a:p>
+            <a:r>
+              <a:rPr lang="en-US" dirty="0"/>
+              <a:t>Hosts the public ISP Server, providing external DNS and Web services.</a:t>
+            </a:r>
+          </a:p>
+          <a:p>
+            <a:r>
+              <a:rPr lang="en-US" dirty="0"/>
+              <a:t>The point where internal private addresses are translated to public routable addresses.</a:t>
+            </a:r>
+          </a:p>
+          <a:p>
+            <a:endParaRPr lang="hu-HU" dirty="0"/>
+          </a:p>
+        </p:txBody>
+      </p:sp>
+      <p:sp>
+        <p:nvSpPr>
+          <p:cNvPr id="4" name="Dia számának helye 3"/>
+          <p:cNvSpPr>
+            <a:spLocks noGrp="1"/>
+          </p:cNvSpPr>
+          <p:nvPr>
+            <p:ph type="sldNum" sz="quarter" idx="5"/>
+          </p:nvPr>
+        </p:nvSpPr>
+        <p:spPr/>
+        <p:txBody>
+          <a:bodyPr/>
+          <a:lstStyle/>
+          <a:p>
+            <a:fld id="{13C8DE43-8A86-4C0A-AAE9-F0A77234DDB0}" type="slidenum">
+              <a:rPr lang="hu-HU" smtClean="0"/>
+              <a:t>15</a:t>
+            </a:fld>
+            <a:endParaRPr lang="hu-HU"/>
+          </a:p>
+        </p:txBody>
+      </p:sp>
+    </p:spTree>
+    <p:extLst>
+      <p:ext uri="{BB962C8B-B14F-4D97-AF65-F5344CB8AC3E}">
+        <p14:creationId xmlns:p14="http://schemas.microsoft.com/office/powerpoint/2010/main" val="224301652"/>
+      </p:ext>
+    </p:extLst>
+  </p:cSld>
+  <p:clrMapOvr>
+    <a:masterClrMapping/>
+  </p:clrMapOvr>
+</p:notes>
+</file>
+
+<file path=ppt/notesSlides/notesSlide15.xml><?xml version="1.0" encoding="utf-8"?>
+<p:notes xmlns:a="http://schemas.openxmlformats.org/drawingml/2006/main" xmlns:r="http://schemas.openxmlformats.org/officeDocument/2006/relationships" xmlns:p="http://schemas.openxmlformats.org/presentationml/2006/main">
+  <p:cSld>
+    <p:spTree>
+      <p:nvGrpSpPr>
+        <p:cNvPr id="1" name=""/>
+        <p:cNvGrpSpPr/>
+        <p:nvPr/>
+      </p:nvGrpSpPr>
+      <p:grpSpPr>
+        <a:xfrm>
+          <a:off x="0" y="0"/>
+          <a:ext cx="0" cy="0"/>
+          <a:chOff x="0" y="0"/>
+          <a:chExt cx="0" cy="0"/>
+        </a:xfrm>
+      </p:grpSpPr>
+      <p:sp>
+        <p:nvSpPr>
+          <p:cNvPr id="2" name="Diakép helye 1"/>
+          <p:cNvSpPr>
+            <a:spLocks noGrp="1" noRot="1" noChangeAspect="1"/>
+          </p:cNvSpPr>
+          <p:nvPr>
+            <p:ph type="sldImg"/>
+          </p:nvPr>
+        </p:nvSpPr>
+        <p:spPr/>
+      </p:sp>
+      <p:sp>
+        <p:nvSpPr>
+          <p:cNvPr id="3" name="Jegyzetek helye 2"/>
+          <p:cNvSpPr>
+            <a:spLocks noGrp="1"/>
+          </p:cNvSpPr>
+          <p:nvPr>
+            <p:ph type="body" idx="1"/>
+          </p:nvPr>
+        </p:nvSpPr>
+        <p:spPr/>
+        <p:txBody>
+          <a:bodyPr/>
+          <a:lstStyle/>
+          <a:p>
+            <a:r>
+              <a:rPr lang="hu-HU" dirty="0"/>
+              <a:t>MARCI</a:t>
+            </a:r>
+          </a:p>
+        </p:txBody>
+      </p:sp>
+      <p:sp>
+        <p:nvSpPr>
+          <p:cNvPr id="4" name="Dia számának helye 3"/>
+          <p:cNvSpPr>
+            <a:spLocks noGrp="1"/>
+          </p:cNvSpPr>
+          <p:nvPr>
+            <p:ph type="sldNum" sz="quarter" idx="5"/>
+          </p:nvPr>
+        </p:nvSpPr>
+        <p:spPr/>
+        <p:txBody>
+          <a:bodyPr/>
+          <a:lstStyle/>
+          <a:p>
+            <a:fld id="{13C8DE43-8A86-4C0A-AAE9-F0A77234DDB0}" type="slidenum">
+              <a:rPr lang="hu-HU" smtClean="0"/>
+              <a:t>16</a:t>
+            </a:fld>
+            <a:endParaRPr lang="hu-HU"/>
+          </a:p>
+        </p:txBody>
+      </p:sp>
+    </p:spTree>
+    <p:extLst>
+      <p:ext uri="{BB962C8B-B14F-4D97-AF65-F5344CB8AC3E}">
+        <p14:creationId xmlns:p14="http://schemas.microsoft.com/office/powerpoint/2010/main" val="3194914265"/>
+      </p:ext>
+    </p:extLst>
+  </p:cSld>
+  <p:clrMapOvr>
+    <a:masterClrMapping/>
+  </p:clrMapOvr>
+</p:notes>
+</file>
+
+<file path=ppt/notesSlides/notesSlide16.xml><?xml version="1.0" encoding="utf-8"?>
+<p:notes xmlns:a="http://schemas.openxmlformats.org/drawingml/2006/main" xmlns:r="http://schemas.openxmlformats.org/officeDocument/2006/relationships" xmlns:p="http://schemas.openxmlformats.org/presentationml/2006/main">
+  <p:cSld>
+    <p:spTree>
+      <p:nvGrpSpPr>
+        <p:cNvPr id="1" name=""/>
+        <p:cNvGrpSpPr/>
+        <p:nvPr/>
+      </p:nvGrpSpPr>
+      <p:grpSpPr>
+        <a:xfrm>
+          <a:off x="0" y="0"/>
+          <a:ext cx="0" cy="0"/>
+          <a:chOff x="0" y="0"/>
+          <a:chExt cx="0" cy="0"/>
+        </a:xfrm>
+      </p:grpSpPr>
+      <p:sp>
+        <p:nvSpPr>
+          <p:cNvPr id="2" name="Diakép helye 1"/>
+          <p:cNvSpPr>
+            <a:spLocks noGrp="1" noRot="1" noChangeAspect="1"/>
+          </p:cNvSpPr>
+          <p:nvPr>
+            <p:ph type="sldImg"/>
+          </p:nvPr>
+        </p:nvSpPr>
+        <p:spPr/>
+      </p:sp>
+      <p:sp>
+        <p:nvSpPr>
+          <p:cNvPr id="3" name="Jegyzetek helye 2"/>
+          <p:cNvSpPr>
+            <a:spLocks noGrp="1"/>
+          </p:cNvSpPr>
+          <p:nvPr>
+            <p:ph type="body" idx="1"/>
+          </p:nvPr>
+        </p:nvSpPr>
+        <p:spPr/>
+        <p:txBody>
+          <a:bodyPr/>
+          <a:lstStyle/>
+          <a:p>
+            <a:r>
+              <a:rPr lang="hu-HU" dirty="0"/>
+              <a:t>MARCI</a:t>
+            </a:r>
+          </a:p>
+          <a:p>
+            <a:r>
+              <a:rPr lang="hu-HU" dirty="0"/>
+              <a:t>PATRIK</a:t>
+            </a:r>
+          </a:p>
+        </p:txBody>
+      </p:sp>
+      <p:sp>
+        <p:nvSpPr>
+          <p:cNvPr id="4" name="Dia számának helye 3"/>
+          <p:cNvSpPr>
+            <a:spLocks noGrp="1"/>
+          </p:cNvSpPr>
+          <p:nvPr>
+            <p:ph type="sldNum" sz="quarter" idx="5"/>
+          </p:nvPr>
+        </p:nvSpPr>
+        <p:spPr/>
+        <p:txBody>
+          <a:bodyPr/>
+          <a:lstStyle/>
+          <a:p>
+            <a:fld id="{13C8DE43-8A86-4C0A-AAE9-F0A77234DDB0}" type="slidenum">
+              <a:rPr lang="hu-HU" smtClean="0"/>
+              <a:t>17</a:t>
+            </a:fld>
+            <a:endParaRPr lang="hu-HU"/>
+          </a:p>
+        </p:txBody>
+      </p:sp>
+    </p:spTree>
+    <p:extLst>
+      <p:ext uri="{BB962C8B-B14F-4D97-AF65-F5344CB8AC3E}">
+        <p14:creationId xmlns:p14="http://schemas.microsoft.com/office/powerpoint/2010/main" val="3849439352"/>
+      </p:ext>
+    </p:extLst>
+  </p:cSld>
+  <p:clrMapOvr>
+    <a:masterClrMapping/>
+  </p:clrMapOvr>
+</p:notes>
+</file>
+
+<file path=ppt/notesSlides/notesSlide17.xml><?xml version="1.0" encoding="utf-8"?>
+<p:notes xmlns:a="http://schemas.openxmlformats.org/drawingml/2006/main" xmlns:r="http://schemas.openxmlformats.org/officeDocument/2006/relationships" xmlns:p="http://schemas.openxmlformats.org/presentationml/2006/main">
+  <p:cSld>
+    <p:spTree>
+      <p:nvGrpSpPr>
+        <p:cNvPr id="1" name=""/>
+        <p:cNvGrpSpPr/>
+        <p:nvPr/>
+      </p:nvGrpSpPr>
+      <p:grpSpPr>
+        <a:xfrm>
+          <a:off x="0" y="0"/>
+          <a:ext cx="0" cy="0"/>
+          <a:chOff x="0" y="0"/>
+          <a:chExt cx="0" cy="0"/>
+        </a:xfrm>
+      </p:grpSpPr>
+      <p:sp>
+        <p:nvSpPr>
+          <p:cNvPr id="2" name="Diakép helye 1"/>
+          <p:cNvSpPr>
+            <a:spLocks noGrp="1" noRot="1" noChangeAspect="1"/>
+          </p:cNvSpPr>
+          <p:nvPr>
+            <p:ph type="sldImg"/>
+          </p:nvPr>
+        </p:nvSpPr>
+        <p:spPr/>
+      </p:sp>
+      <p:sp>
+        <p:nvSpPr>
+          <p:cNvPr id="3" name="Jegyzetek helye 2"/>
+          <p:cNvSpPr>
+            <a:spLocks noGrp="1"/>
+          </p:cNvSpPr>
+          <p:nvPr>
+            <p:ph type="body" idx="1"/>
+          </p:nvPr>
+        </p:nvSpPr>
+        <p:spPr/>
+        <p:txBody>
+          <a:bodyPr/>
+          <a:lstStyle/>
+          <a:p>
+            <a:r>
+              <a:rPr lang="hu-HU" dirty="0"/>
+              <a:t>1-2 MARCI</a:t>
+            </a:r>
+          </a:p>
+          <a:p>
+            <a:r>
+              <a:rPr lang="hu-HU" dirty="0"/>
+              <a:t>3-4 PATRIK</a:t>
+            </a:r>
+          </a:p>
+        </p:txBody>
+      </p:sp>
+      <p:sp>
+        <p:nvSpPr>
+          <p:cNvPr id="4" name="Dia számának helye 3"/>
+          <p:cNvSpPr>
+            <a:spLocks noGrp="1"/>
+          </p:cNvSpPr>
+          <p:nvPr>
+            <p:ph type="sldNum" sz="quarter" idx="5"/>
+          </p:nvPr>
+        </p:nvSpPr>
+        <p:spPr/>
+        <p:txBody>
+          <a:bodyPr/>
+          <a:lstStyle/>
+          <a:p>
+            <a:fld id="{13C8DE43-8A86-4C0A-AAE9-F0A77234DDB0}" type="slidenum">
+              <a:rPr lang="hu-HU" smtClean="0"/>
+              <a:t>19</a:t>
+            </a:fld>
+            <a:endParaRPr lang="hu-HU"/>
+          </a:p>
+        </p:txBody>
+      </p:sp>
+    </p:spTree>
+    <p:extLst>
+      <p:ext uri="{BB962C8B-B14F-4D97-AF65-F5344CB8AC3E}">
+        <p14:creationId xmlns:p14="http://schemas.microsoft.com/office/powerpoint/2010/main" val="1192948653"/>
+      </p:ext>
+    </p:extLst>
+  </p:cSld>
+  <p:clrMapOvr>
+    <a:masterClrMapping/>
+  </p:clrMapOvr>
+</p:notes>
+</file>
+
+<file path=ppt/notesSlides/notesSlide18.xml><?xml version="1.0" encoding="utf-8"?>
+<p:notes xmlns:a="http://schemas.openxmlformats.org/drawingml/2006/main" xmlns:r="http://schemas.openxmlformats.org/officeDocument/2006/relationships" xmlns:p="http://schemas.openxmlformats.org/presentationml/2006/main">
+  <p:cSld>
+    <p:spTree>
+      <p:nvGrpSpPr>
+        <p:cNvPr id="1" name=""/>
+        <p:cNvGrpSpPr/>
+        <p:nvPr/>
+      </p:nvGrpSpPr>
+      <p:grpSpPr>
+        <a:xfrm>
+          <a:off x="0" y="0"/>
+          <a:ext cx="0" cy="0"/>
+          <a:chOff x="0" y="0"/>
+          <a:chExt cx="0" cy="0"/>
+        </a:xfrm>
+      </p:grpSpPr>
+      <p:sp>
+        <p:nvSpPr>
+          <p:cNvPr id="2" name="Diakép helye 1"/>
+          <p:cNvSpPr>
+            <a:spLocks noGrp="1" noRot="1" noChangeAspect="1"/>
+          </p:cNvSpPr>
+          <p:nvPr>
+            <p:ph type="sldImg"/>
+          </p:nvPr>
+        </p:nvSpPr>
+        <p:spPr/>
+      </p:sp>
+      <p:sp>
+        <p:nvSpPr>
+          <p:cNvPr id="3" name="Jegyzetek helye 2"/>
+          <p:cNvSpPr>
+            <a:spLocks noGrp="1"/>
+          </p:cNvSpPr>
+          <p:nvPr>
+            <p:ph type="body" idx="1"/>
+          </p:nvPr>
+        </p:nvSpPr>
+        <p:spPr/>
+        <p:txBody>
+          <a:bodyPr/>
+          <a:lstStyle/>
+          <a:p>
+            <a:r>
+              <a:rPr lang="hu-HU" dirty="0"/>
+              <a:t>PATRIK</a:t>
+            </a:r>
+          </a:p>
+        </p:txBody>
+      </p:sp>
+      <p:sp>
+        <p:nvSpPr>
+          <p:cNvPr id="4" name="Dia számának helye 3"/>
+          <p:cNvSpPr>
+            <a:spLocks noGrp="1"/>
+          </p:cNvSpPr>
+          <p:nvPr>
+            <p:ph type="sldNum" sz="quarter" idx="5"/>
+          </p:nvPr>
+        </p:nvSpPr>
+        <p:spPr/>
+        <p:txBody>
+          <a:bodyPr/>
+          <a:lstStyle/>
+          <a:p>
+            <a:fld id="{13C8DE43-8A86-4C0A-AAE9-F0A77234DDB0}" type="slidenum">
+              <a:rPr lang="hu-HU" smtClean="0"/>
+              <a:t>20</a:t>
+            </a:fld>
+            <a:endParaRPr lang="hu-HU"/>
+          </a:p>
+        </p:txBody>
+      </p:sp>
+    </p:spTree>
+    <p:extLst>
+      <p:ext uri="{BB962C8B-B14F-4D97-AF65-F5344CB8AC3E}">
+        <p14:creationId xmlns:p14="http://schemas.microsoft.com/office/powerpoint/2010/main" val="35677072"/>
+      </p:ext>
+    </p:extLst>
+  </p:cSld>
+  <p:clrMapOvr>
+    <a:masterClrMapping/>
+  </p:clrMapOvr>
+</p:notes>
+</file>
+
+<file path=ppt/notesSlides/notesSlide2.xml><?xml version="1.0" encoding="utf-8"?>
+<p:notes xmlns:a="http://schemas.openxmlformats.org/drawingml/2006/main" xmlns:r="http://schemas.openxmlformats.org/officeDocument/2006/relationships" xmlns:p="http://schemas.openxmlformats.org/presentationml/2006/main">
+  <p:cSld>
+    <p:spTree>
+      <p:nvGrpSpPr>
+        <p:cNvPr id="1" name=""/>
+        <p:cNvGrpSpPr/>
+        <p:nvPr/>
+      </p:nvGrpSpPr>
+      <p:grpSpPr>
+        <a:xfrm>
+          <a:off x="0" y="0"/>
+          <a:ext cx="0" cy="0"/>
+          <a:chOff x="0" y="0"/>
+          <a:chExt cx="0" cy="0"/>
+        </a:xfrm>
+      </p:grpSpPr>
+      <p:sp>
+        <p:nvSpPr>
+          <p:cNvPr id="2" name="Diakép helye 1"/>
+          <p:cNvSpPr>
+            <a:spLocks noGrp="1" noRot="1" noChangeAspect="1"/>
+          </p:cNvSpPr>
+          <p:nvPr>
+            <p:ph type="sldImg"/>
+          </p:nvPr>
+        </p:nvSpPr>
+        <p:spPr/>
+      </p:sp>
+      <p:sp>
+        <p:nvSpPr>
+          <p:cNvPr id="3" name="Jegyzetek helye 2"/>
+          <p:cNvSpPr>
+            <a:spLocks noGrp="1"/>
+          </p:cNvSpPr>
+          <p:nvPr>
+            <p:ph type="body" idx="1"/>
+          </p:nvPr>
+        </p:nvSpPr>
+        <p:spPr/>
+        <p:txBody>
+          <a:bodyPr/>
+          <a:lstStyle/>
+          <a:p>
+            <a:r>
+              <a:rPr lang="hu-HU" dirty="0"/>
+              <a:t>1-MARCI</a:t>
+            </a:r>
+            <a:br>
+              <a:rPr lang="hu-HU" dirty="0"/>
+            </a:br>
+            <a:r>
+              <a:rPr lang="hu-HU" dirty="0"/>
+              <a:t>2-PATRIK</a:t>
+            </a:r>
+          </a:p>
+        </p:txBody>
+      </p:sp>
+      <p:sp>
+        <p:nvSpPr>
+          <p:cNvPr id="4" name="Dia számának helye 3"/>
+          <p:cNvSpPr>
+            <a:spLocks noGrp="1"/>
+          </p:cNvSpPr>
+          <p:nvPr>
+            <p:ph type="sldNum" sz="quarter" idx="5"/>
+          </p:nvPr>
+        </p:nvSpPr>
+        <p:spPr/>
+        <p:txBody>
+          <a:bodyPr/>
+          <a:lstStyle/>
+          <a:p>
+            <a:fld id="{13C8DE43-8A86-4C0A-AAE9-F0A77234DDB0}" type="slidenum">
+              <a:rPr lang="hu-HU" smtClean="0"/>
+              <a:t>3</a:t>
+            </a:fld>
+            <a:endParaRPr lang="hu-HU"/>
+          </a:p>
+        </p:txBody>
+      </p:sp>
+    </p:spTree>
+    <p:extLst>
+      <p:ext uri="{BB962C8B-B14F-4D97-AF65-F5344CB8AC3E}">
+        <p14:creationId xmlns:p14="http://schemas.microsoft.com/office/powerpoint/2010/main" val="2390536084"/>
+      </p:ext>
+    </p:extLst>
+  </p:cSld>
+  <p:clrMapOvr>
+    <a:masterClrMapping/>
+  </p:clrMapOvr>
+</p:notes>
+</file>
+
+<file path=ppt/notesSlides/notesSlide3.xml><?xml version="1.0" encoding="utf-8"?>
+<p:notes xmlns:a="http://schemas.openxmlformats.org/drawingml/2006/main" xmlns:r="http://schemas.openxmlformats.org/officeDocument/2006/relationships" xmlns:p="http://schemas.openxmlformats.org/presentationml/2006/main">
+  <p:cSld>
+    <p:spTree>
+      <p:nvGrpSpPr>
+        <p:cNvPr id="1" name=""/>
+        <p:cNvGrpSpPr/>
+        <p:nvPr/>
+      </p:nvGrpSpPr>
+      <p:grpSpPr>
+        <a:xfrm>
+          <a:off x="0" y="0"/>
+          <a:ext cx="0" cy="0"/>
+          <a:chOff x="0" y="0"/>
+          <a:chExt cx="0" cy="0"/>
+        </a:xfrm>
+      </p:grpSpPr>
+      <p:sp>
+        <p:nvSpPr>
+          <p:cNvPr id="2" name="Diakép helye 1"/>
+          <p:cNvSpPr>
+            <a:spLocks noGrp="1" noRot="1" noChangeAspect="1"/>
+          </p:cNvSpPr>
+          <p:nvPr>
+            <p:ph type="sldImg"/>
+          </p:nvPr>
+        </p:nvSpPr>
+        <p:spPr/>
+      </p:sp>
+      <p:sp>
+        <p:nvSpPr>
+          <p:cNvPr id="3" name="Jegyzetek helye 2"/>
+          <p:cNvSpPr>
+            <a:spLocks noGrp="1"/>
+          </p:cNvSpPr>
+          <p:nvPr>
+            <p:ph type="body" idx="1"/>
+          </p:nvPr>
+        </p:nvSpPr>
+        <p:spPr/>
+        <p:txBody>
+          <a:bodyPr/>
+          <a:lstStyle/>
+          <a:p>
+            <a:r>
+              <a:rPr lang="hu-HU" dirty="0"/>
+              <a:t>Mixed </a:t>
+            </a:r>
+            <a:r>
+              <a:rPr lang="hu-HU" dirty="0" err="1"/>
+              <a:t>topology</a:t>
+            </a:r>
+            <a:r>
+              <a:rPr lang="hu-HU" dirty="0"/>
+              <a:t>, </a:t>
+            </a:r>
+            <a:r>
+              <a:rPr lang="hu-HU" dirty="0" err="1"/>
+              <a:t>star</a:t>
+            </a:r>
+            <a:r>
+              <a:rPr lang="hu-HU" dirty="0"/>
+              <a:t> and ring </a:t>
+            </a:r>
+            <a:r>
+              <a:rPr lang="hu-HU" dirty="0" err="1"/>
+              <a:t>topology</a:t>
+            </a:r>
+            <a:r>
+              <a:rPr lang="hu-HU" dirty="0"/>
+              <a:t> and </a:t>
+            </a:r>
+            <a:r>
+              <a:rPr lang="hu-HU" dirty="0" err="1"/>
+              <a:t>switch</a:t>
+            </a:r>
+            <a:r>
+              <a:rPr lang="hu-HU" dirty="0"/>
+              <a:t> </a:t>
+            </a:r>
+            <a:r>
+              <a:rPr lang="hu-HU" dirty="0" err="1"/>
+              <a:t>stacking</a:t>
+            </a:r>
+            <a:endParaRPr lang="hu-HU" dirty="0"/>
+          </a:p>
+        </p:txBody>
+      </p:sp>
+      <p:sp>
+        <p:nvSpPr>
+          <p:cNvPr id="4" name="Dia számának helye 3"/>
+          <p:cNvSpPr>
+            <a:spLocks noGrp="1"/>
+          </p:cNvSpPr>
+          <p:nvPr>
+            <p:ph type="sldNum" sz="quarter" idx="5"/>
+          </p:nvPr>
+        </p:nvSpPr>
+        <p:spPr/>
+        <p:txBody>
+          <a:bodyPr/>
+          <a:lstStyle/>
+          <a:p>
+            <a:fld id="{13C8DE43-8A86-4C0A-AAE9-F0A77234DDB0}" type="slidenum">
+              <a:rPr lang="hu-HU" smtClean="0"/>
+              <a:t>4</a:t>
+            </a:fld>
+            <a:endParaRPr lang="hu-HU"/>
+          </a:p>
+        </p:txBody>
+      </p:sp>
+    </p:spTree>
+    <p:extLst>
+      <p:ext uri="{BB962C8B-B14F-4D97-AF65-F5344CB8AC3E}">
+        <p14:creationId xmlns:p14="http://schemas.microsoft.com/office/powerpoint/2010/main" val="1118793362"/>
+      </p:ext>
+    </p:extLst>
+  </p:cSld>
+  <p:clrMapOvr>
+    <a:masterClrMapping/>
+  </p:clrMapOvr>
+</p:notes>
+</file>
+
+<file path=ppt/notesSlides/notesSlide4.xml><?xml version="1.0" encoding="utf-8"?>
+<p:notes xmlns:a="http://schemas.openxmlformats.org/drawingml/2006/main" xmlns:r="http://schemas.openxmlformats.org/officeDocument/2006/relationships" xmlns:p="http://schemas.openxmlformats.org/presentationml/2006/main">
+  <p:cSld>
+    <p:spTree>
+      <p:nvGrpSpPr>
+        <p:cNvPr id="1" name=""/>
+        <p:cNvGrpSpPr/>
+        <p:nvPr/>
+      </p:nvGrpSpPr>
+      <p:grpSpPr>
+        <a:xfrm>
+          <a:off x="0" y="0"/>
+          <a:ext cx="0" cy="0"/>
+          <a:chOff x="0" y="0"/>
+          <a:chExt cx="0" cy="0"/>
+        </a:xfrm>
+      </p:grpSpPr>
+      <p:sp>
+        <p:nvSpPr>
+          <p:cNvPr id="2" name="Diakép helye 1"/>
+          <p:cNvSpPr>
+            <a:spLocks noGrp="1" noRot="1" noChangeAspect="1"/>
+          </p:cNvSpPr>
+          <p:nvPr>
+            <p:ph type="sldImg"/>
+          </p:nvPr>
+        </p:nvSpPr>
+        <p:spPr/>
+      </p:sp>
+      <p:sp>
+        <p:nvSpPr>
+          <p:cNvPr id="3" name="Jegyzetek helye 2"/>
+          <p:cNvSpPr>
+            <a:spLocks noGrp="1"/>
+          </p:cNvSpPr>
+          <p:nvPr>
+            <p:ph type="body" idx="1"/>
+          </p:nvPr>
+        </p:nvSpPr>
+        <p:spPr/>
+        <p:txBody>
+          <a:bodyPr/>
+          <a:lstStyle/>
+          <a:p>
+            <a:r>
+              <a:rPr lang="hu-HU" dirty="0"/>
+              <a:t>PATRIK</a:t>
+            </a:r>
+          </a:p>
+        </p:txBody>
+      </p:sp>
+      <p:sp>
+        <p:nvSpPr>
+          <p:cNvPr id="4" name="Dia számának helye 3"/>
+          <p:cNvSpPr>
+            <a:spLocks noGrp="1"/>
+          </p:cNvSpPr>
+          <p:nvPr>
+            <p:ph type="sldNum" sz="quarter" idx="5"/>
+          </p:nvPr>
+        </p:nvSpPr>
+        <p:spPr/>
+        <p:txBody>
+          <a:bodyPr/>
+          <a:lstStyle/>
+          <a:p>
+            <a:fld id="{13C8DE43-8A86-4C0A-AAE9-F0A77234DDB0}" type="slidenum">
+              <a:rPr lang="hu-HU" smtClean="0"/>
+              <a:t>5</a:t>
+            </a:fld>
+            <a:endParaRPr lang="hu-HU"/>
+          </a:p>
+        </p:txBody>
+      </p:sp>
+    </p:spTree>
+    <p:extLst>
+      <p:ext uri="{BB962C8B-B14F-4D97-AF65-F5344CB8AC3E}">
+        <p14:creationId xmlns:p14="http://schemas.microsoft.com/office/powerpoint/2010/main" val="815506640"/>
+      </p:ext>
+    </p:extLst>
+  </p:cSld>
+  <p:clrMapOvr>
+    <a:masterClrMapping/>
+  </p:clrMapOvr>
+</p:notes>
+</file>
+
+<file path=ppt/notesSlides/notesSlide5.xml><?xml version="1.0" encoding="utf-8"?>
+<p:notes xmlns:a="http://schemas.openxmlformats.org/drawingml/2006/main" xmlns:r="http://schemas.openxmlformats.org/officeDocument/2006/relationships" xmlns:p="http://schemas.openxmlformats.org/presentationml/2006/main">
+  <p:cSld>
+    <p:spTree>
+      <p:nvGrpSpPr>
+        <p:cNvPr id="1" name=""/>
+        <p:cNvGrpSpPr/>
+        <p:nvPr/>
+      </p:nvGrpSpPr>
+      <p:grpSpPr>
+        <a:xfrm>
+          <a:off x="0" y="0"/>
+          <a:ext cx="0" cy="0"/>
+          <a:chOff x="0" y="0"/>
+          <a:chExt cx="0" cy="0"/>
+        </a:xfrm>
+      </p:grpSpPr>
+      <p:sp>
+        <p:nvSpPr>
+          <p:cNvPr id="2" name="Diakép helye 1"/>
+          <p:cNvSpPr>
+            <a:spLocks noGrp="1" noRot="1" noChangeAspect="1"/>
+          </p:cNvSpPr>
+          <p:nvPr>
+            <p:ph type="sldImg"/>
+          </p:nvPr>
+        </p:nvSpPr>
+        <p:spPr/>
+      </p:sp>
+      <p:sp>
+        <p:nvSpPr>
+          <p:cNvPr id="3" name="Jegyzetek helye 2"/>
+          <p:cNvSpPr>
+            <a:spLocks noGrp="1"/>
+          </p:cNvSpPr>
+          <p:nvPr>
+            <p:ph type="body" idx="1"/>
+          </p:nvPr>
+        </p:nvSpPr>
+        <p:spPr/>
+        <p:txBody>
+          <a:bodyPr/>
+          <a:lstStyle/>
+          <a:p>
+            <a:r>
+              <a:rPr lang="hu-HU" dirty="0"/>
+              <a:t>MARCI</a:t>
+            </a:r>
+            <a:br>
+              <a:rPr lang="hu-HU" dirty="0"/>
+            </a:br>
+            <a:r>
+              <a:rPr lang="en-US" dirty="0"/>
+              <a:t>ACLs block unauthorized outbound traffic from the Finance VLAN.</a:t>
+            </a:r>
+            <a:endParaRPr lang="hu-HU" dirty="0"/>
+          </a:p>
+        </p:txBody>
+      </p:sp>
+      <p:sp>
+        <p:nvSpPr>
+          <p:cNvPr id="4" name="Dia számának helye 3"/>
+          <p:cNvSpPr>
+            <a:spLocks noGrp="1"/>
+          </p:cNvSpPr>
+          <p:nvPr>
+            <p:ph type="sldNum" sz="quarter" idx="5"/>
+          </p:nvPr>
+        </p:nvSpPr>
+        <p:spPr/>
+        <p:txBody>
+          <a:bodyPr/>
+          <a:lstStyle/>
+          <a:p>
+            <a:fld id="{13C8DE43-8A86-4C0A-AAE9-F0A77234DDB0}" type="slidenum">
+              <a:rPr lang="hu-HU" smtClean="0"/>
+              <a:t>6</a:t>
+            </a:fld>
+            <a:endParaRPr lang="hu-HU"/>
+          </a:p>
+        </p:txBody>
+      </p:sp>
+    </p:spTree>
+    <p:extLst>
+      <p:ext uri="{BB962C8B-B14F-4D97-AF65-F5344CB8AC3E}">
+        <p14:creationId xmlns:p14="http://schemas.microsoft.com/office/powerpoint/2010/main" val="2567937060"/>
+      </p:ext>
+    </p:extLst>
+  </p:cSld>
+  <p:clrMapOvr>
+    <a:masterClrMapping/>
+  </p:clrMapOvr>
+</p:notes>
+</file>
+
+<file path=ppt/notesSlides/notesSlide6.xml><?xml version="1.0" encoding="utf-8"?>
+<p:notes xmlns:a="http://schemas.openxmlformats.org/drawingml/2006/main" xmlns:r="http://schemas.openxmlformats.org/officeDocument/2006/relationships" xmlns:p="http://schemas.openxmlformats.org/presentationml/2006/main">
+  <p:cSld>
+    <p:spTree>
+      <p:nvGrpSpPr>
+        <p:cNvPr id="1" name=""/>
+        <p:cNvGrpSpPr/>
+        <p:nvPr/>
+      </p:nvGrpSpPr>
+      <p:grpSpPr>
+        <a:xfrm>
+          <a:off x="0" y="0"/>
+          <a:ext cx="0" cy="0"/>
+          <a:chOff x="0" y="0"/>
+          <a:chExt cx="0" cy="0"/>
+        </a:xfrm>
+      </p:grpSpPr>
+      <p:sp>
+        <p:nvSpPr>
+          <p:cNvPr id="2" name="Diakép helye 1"/>
+          <p:cNvSpPr>
+            <a:spLocks noGrp="1" noRot="1" noChangeAspect="1"/>
+          </p:cNvSpPr>
+          <p:nvPr>
+            <p:ph type="sldImg"/>
+          </p:nvPr>
+        </p:nvSpPr>
+        <p:spPr/>
+      </p:sp>
+      <p:sp>
+        <p:nvSpPr>
+          <p:cNvPr id="3" name="Jegyzetek helye 2"/>
+          <p:cNvSpPr>
+            <a:spLocks noGrp="1"/>
+          </p:cNvSpPr>
+          <p:nvPr>
+            <p:ph type="body" idx="1"/>
+          </p:nvPr>
+        </p:nvSpPr>
+        <p:spPr/>
+        <p:txBody>
+          <a:bodyPr/>
+          <a:lstStyle/>
+          <a:p>
+            <a:r>
+              <a:rPr lang="hu-HU" dirty="0"/>
+              <a:t>PATRIK</a:t>
+            </a:r>
+            <a:br>
+              <a:rPr lang="hu-HU" dirty="0"/>
+            </a:br>
+            <a:r>
+              <a:rPr lang="en-US" dirty="0"/>
+              <a:t>Secure tunnel between the Dispatcher and the Central Router.</a:t>
+            </a:r>
+            <a:endParaRPr lang="hu-HU" dirty="0"/>
+          </a:p>
+        </p:txBody>
+      </p:sp>
+      <p:sp>
+        <p:nvSpPr>
+          <p:cNvPr id="4" name="Dia számának helye 3"/>
+          <p:cNvSpPr>
+            <a:spLocks noGrp="1"/>
+          </p:cNvSpPr>
+          <p:nvPr>
+            <p:ph type="sldNum" sz="quarter" idx="5"/>
+          </p:nvPr>
+        </p:nvSpPr>
+        <p:spPr/>
+        <p:txBody>
+          <a:bodyPr/>
+          <a:lstStyle/>
+          <a:p>
+            <a:fld id="{13C8DE43-8A86-4C0A-AAE9-F0A77234DDB0}" type="slidenum">
+              <a:rPr lang="hu-HU" smtClean="0"/>
+              <a:t>7</a:t>
+            </a:fld>
+            <a:endParaRPr lang="hu-HU"/>
+          </a:p>
+        </p:txBody>
+      </p:sp>
+    </p:spTree>
+    <p:extLst>
+      <p:ext uri="{BB962C8B-B14F-4D97-AF65-F5344CB8AC3E}">
+        <p14:creationId xmlns:p14="http://schemas.microsoft.com/office/powerpoint/2010/main" val="197604203"/>
+      </p:ext>
+    </p:extLst>
+  </p:cSld>
+  <p:clrMapOvr>
+    <a:masterClrMapping/>
+  </p:clrMapOvr>
+</p:notes>
+</file>
+
+<file path=ppt/notesSlides/notesSlide7.xml><?xml version="1.0" encoding="utf-8"?>
+<p:notes xmlns:a="http://schemas.openxmlformats.org/drawingml/2006/main" xmlns:r="http://schemas.openxmlformats.org/officeDocument/2006/relationships" xmlns:p="http://schemas.openxmlformats.org/presentationml/2006/main">
+  <p:cSld>
+    <p:spTree>
+      <p:nvGrpSpPr>
+        <p:cNvPr id="1" name=""/>
+        <p:cNvGrpSpPr/>
+        <p:nvPr/>
+      </p:nvGrpSpPr>
+      <p:grpSpPr>
+        <a:xfrm>
+          <a:off x="0" y="0"/>
+          <a:ext cx="0" cy="0"/>
+          <a:chOff x="0" y="0"/>
+          <a:chExt cx="0" cy="0"/>
+        </a:xfrm>
+      </p:grpSpPr>
+      <p:sp>
+        <p:nvSpPr>
+          <p:cNvPr id="2" name="Diakép helye 1"/>
+          <p:cNvSpPr>
+            <a:spLocks noGrp="1" noRot="1" noChangeAspect="1"/>
+          </p:cNvSpPr>
+          <p:nvPr>
+            <p:ph type="sldImg"/>
+          </p:nvPr>
+        </p:nvSpPr>
+        <p:spPr/>
+      </p:sp>
+      <p:sp>
+        <p:nvSpPr>
+          <p:cNvPr id="3" name="Jegyzetek helye 2"/>
+          <p:cNvSpPr>
+            <a:spLocks noGrp="1"/>
+          </p:cNvSpPr>
+          <p:nvPr>
+            <p:ph type="body" idx="1"/>
+          </p:nvPr>
+        </p:nvSpPr>
+        <p:spPr/>
+        <p:txBody>
+          <a:bodyPr/>
+          <a:lstStyle/>
+          <a:p>
+            <a:r>
+              <a:rPr lang="hu-HU" dirty="0"/>
+              <a:t>MARCI</a:t>
+            </a:r>
+          </a:p>
+        </p:txBody>
+      </p:sp>
+      <p:sp>
+        <p:nvSpPr>
+          <p:cNvPr id="4" name="Dia számának helye 3"/>
+          <p:cNvSpPr>
+            <a:spLocks noGrp="1"/>
+          </p:cNvSpPr>
+          <p:nvPr>
+            <p:ph type="sldNum" sz="quarter" idx="5"/>
+          </p:nvPr>
+        </p:nvSpPr>
+        <p:spPr/>
+        <p:txBody>
+          <a:bodyPr/>
+          <a:lstStyle/>
+          <a:p>
+            <a:fld id="{13C8DE43-8A86-4C0A-AAE9-F0A77234DDB0}" type="slidenum">
+              <a:rPr lang="hu-HU" smtClean="0"/>
+              <a:t>8</a:t>
+            </a:fld>
+            <a:endParaRPr lang="hu-HU"/>
+          </a:p>
+        </p:txBody>
+      </p:sp>
+    </p:spTree>
+    <p:extLst>
+      <p:ext uri="{BB962C8B-B14F-4D97-AF65-F5344CB8AC3E}">
+        <p14:creationId xmlns:p14="http://schemas.microsoft.com/office/powerpoint/2010/main" val="723888396"/>
+      </p:ext>
+    </p:extLst>
+  </p:cSld>
+  <p:clrMapOvr>
+    <a:masterClrMapping/>
+  </p:clrMapOvr>
+</p:notes>
+</file>
+
+<file path=ppt/notesSlides/notesSlide8.xml><?xml version="1.0" encoding="utf-8"?>
+<p:notes xmlns:a="http://schemas.openxmlformats.org/drawingml/2006/main" xmlns:r="http://schemas.openxmlformats.org/officeDocument/2006/relationships" xmlns:p="http://schemas.openxmlformats.org/presentationml/2006/main">
+  <p:cSld>
+    <p:spTree>
+      <p:nvGrpSpPr>
+        <p:cNvPr id="1" name=""/>
+        <p:cNvGrpSpPr/>
+        <p:nvPr/>
+      </p:nvGrpSpPr>
+      <p:grpSpPr>
+        <a:xfrm>
+          <a:off x="0" y="0"/>
+          <a:ext cx="0" cy="0"/>
+          <a:chOff x="0" y="0"/>
+          <a:chExt cx="0" cy="0"/>
+        </a:xfrm>
+      </p:grpSpPr>
+      <p:sp>
+        <p:nvSpPr>
+          <p:cNvPr id="2" name="Diakép helye 1"/>
+          <p:cNvSpPr>
+            <a:spLocks noGrp="1" noRot="1" noChangeAspect="1"/>
+          </p:cNvSpPr>
+          <p:nvPr>
+            <p:ph type="sldImg"/>
+          </p:nvPr>
+        </p:nvSpPr>
+        <p:spPr/>
+      </p:sp>
+      <p:sp>
+        <p:nvSpPr>
+          <p:cNvPr id="3" name="Jegyzetek helye 2"/>
+          <p:cNvSpPr>
+            <a:spLocks noGrp="1"/>
+          </p:cNvSpPr>
+          <p:nvPr>
+            <p:ph type="body" idx="1"/>
+          </p:nvPr>
+        </p:nvSpPr>
+        <p:spPr/>
+        <p:txBody>
+          <a:bodyPr/>
+          <a:lstStyle/>
+          <a:p>
+            <a:pPr marL="0" marR="0" lvl="0" indent="0" algn="l" defTabSz="914400" rtl="0" eaLnBrk="1" fontAlgn="auto" latinLnBrk="0" hangingPunct="1">
+              <a:lnSpc>
+                <a:spcPct val="100000"/>
+              </a:lnSpc>
+              <a:spcBef>
+                <a:spcPts val="0"/>
+              </a:spcBef>
+              <a:spcAft>
+                <a:spcPts val="0"/>
+              </a:spcAft>
+              <a:buClrTx/>
+              <a:buSzTx/>
+              <a:buFontTx/>
+              <a:buNone/>
+              <a:tabLst/>
+              <a:defRPr/>
+            </a:pPr>
+            <a:r>
+              <a:rPr lang="hu-HU" dirty="0"/>
+              <a:t>PATRIK</a:t>
+            </a:r>
+            <a:br>
+              <a:rPr lang="hu-HU" dirty="0"/>
+            </a:br>
+            <a:r>
+              <a:rPr lang="en-US" dirty="0"/>
+              <a:t>All IoT devices are registered to and monitored by a dedicated IoT Server.</a:t>
+            </a:r>
+          </a:p>
+          <a:p>
+            <a:endParaRPr lang="hu-HU" dirty="0"/>
+          </a:p>
+        </p:txBody>
+      </p:sp>
+      <p:sp>
+        <p:nvSpPr>
+          <p:cNvPr id="4" name="Dia számának helye 3"/>
+          <p:cNvSpPr>
+            <a:spLocks noGrp="1"/>
+          </p:cNvSpPr>
+          <p:nvPr>
+            <p:ph type="sldNum" sz="quarter" idx="5"/>
+          </p:nvPr>
+        </p:nvSpPr>
+        <p:spPr/>
+        <p:txBody>
+          <a:bodyPr/>
+          <a:lstStyle/>
+          <a:p>
+            <a:fld id="{13C8DE43-8A86-4C0A-AAE9-F0A77234DDB0}" type="slidenum">
+              <a:rPr lang="hu-HU" smtClean="0"/>
+              <a:t>9</a:t>
+            </a:fld>
+            <a:endParaRPr lang="hu-HU"/>
+          </a:p>
+        </p:txBody>
+      </p:sp>
+    </p:spTree>
+    <p:extLst>
+      <p:ext uri="{BB962C8B-B14F-4D97-AF65-F5344CB8AC3E}">
+        <p14:creationId xmlns:p14="http://schemas.microsoft.com/office/powerpoint/2010/main" val="4291277780"/>
+      </p:ext>
+    </p:extLst>
+  </p:cSld>
+  <p:clrMapOvr>
+    <a:masterClrMapping/>
+  </p:clrMapOvr>
+</p:notes>
+</file>
+
+<file path=ppt/notesSlides/notesSlide9.xml><?xml version="1.0" encoding="utf-8"?>
+<p:notes xmlns:a="http://schemas.openxmlformats.org/drawingml/2006/main" xmlns:r="http://schemas.openxmlformats.org/officeDocument/2006/relationships" xmlns:p="http://schemas.openxmlformats.org/presentationml/2006/main">
+  <p:cSld>
+    <p:spTree>
+      <p:nvGrpSpPr>
+        <p:cNvPr id="1" name=""/>
+        <p:cNvGrpSpPr/>
+        <p:nvPr/>
+      </p:nvGrpSpPr>
+      <p:grpSpPr>
+        <a:xfrm>
+          <a:off x="0" y="0"/>
+          <a:ext cx="0" cy="0"/>
+          <a:chOff x="0" y="0"/>
+          <a:chExt cx="0" cy="0"/>
+        </a:xfrm>
+      </p:grpSpPr>
+      <p:sp>
+        <p:nvSpPr>
+          <p:cNvPr id="2" name="Diakép helye 1"/>
+          <p:cNvSpPr>
+            <a:spLocks noGrp="1" noRot="1" noChangeAspect="1"/>
+          </p:cNvSpPr>
+          <p:nvPr>
+            <p:ph type="sldImg"/>
+          </p:nvPr>
+        </p:nvSpPr>
+        <p:spPr/>
+      </p:sp>
+      <p:sp>
+        <p:nvSpPr>
+          <p:cNvPr id="3" name="Jegyzetek helye 2"/>
+          <p:cNvSpPr>
+            <a:spLocks noGrp="1"/>
+          </p:cNvSpPr>
+          <p:nvPr>
+            <p:ph type="body" idx="1"/>
+          </p:nvPr>
+        </p:nvSpPr>
+        <p:spPr/>
+        <p:txBody>
+          <a:bodyPr/>
+          <a:lstStyle/>
+          <a:p>
+            <a:r>
+              <a:rPr lang="hu-HU" dirty="0"/>
+              <a:t>PATRIK</a:t>
+            </a:r>
+          </a:p>
+          <a:p>
+            <a:r>
+              <a:rPr lang="en-US" dirty="0"/>
+              <a:t>Internal users can access the Internet, but external access to the medical network is blocked.</a:t>
+            </a:r>
+          </a:p>
+          <a:p>
+            <a:r>
+              <a:rPr lang="en-US" dirty="0"/>
+              <a:t>Higher security level (Inside/Medical) vs. lower security level</a:t>
+            </a:r>
+            <a:endParaRPr lang="hu-HU" dirty="0"/>
+          </a:p>
+          <a:p>
+            <a:r>
+              <a:rPr lang="en-US" dirty="0"/>
+              <a:t>The firewall tracks outgoing requests and only permits the corresponding return traffic.</a:t>
+            </a:r>
+          </a:p>
+          <a:p>
+            <a:endParaRPr lang="hu-HU" dirty="0"/>
+          </a:p>
+        </p:txBody>
+      </p:sp>
+      <p:sp>
+        <p:nvSpPr>
+          <p:cNvPr id="4" name="Dia számának helye 3"/>
+          <p:cNvSpPr>
+            <a:spLocks noGrp="1"/>
+          </p:cNvSpPr>
+          <p:nvPr>
+            <p:ph type="sldNum" sz="quarter" idx="5"/>
+          </p:nvPr>
+        </p:nvSpPr>
+        <p:spPr/>
+        <p:txBody>
+          <a:bodyPr/>
+          <a:lstStyle/>
+          <a:p>
+            <a:fld id="{13C8DE43-8A86-4C0A-AAE9-F0A77234DDB0}" type="slidenum">
+              <a:rPr lang="hu-HU" smtClean="0"/>
+              <a:t>10</a:t>
+            </a:fld>
+            <a:endParaRPr lang="hu-HU"/>
+          </a:p>
+        </p:txBody>
+      </p:sp>
+    </p:spTree>
+    <p:extLst>
+      <p:ext uri="{BB962C8B-B14F-4D97-AF65-F5344CB8AC3E}">
+        <p14:creationId xmlns:p14="http://schemas.microsoft.com/office/powerpoint/2010/main" val="1473059393"/>
+      </p:ext>
+    </p:extLst>
+  </p:cSld>
+  <p:clrMapOvr>
+    <a:masterClrMapping/>
+  </p:clrMapOvr>
+</p:notes>
+</file>
+
 <file path=ppt/slideLayouts/slideLayout1.xml><?xml version="1.0" encoding="utf-8"?>
 <p:sldLayout xmlns:a="http://schemas.openxmlformats.org/drawingml/2006/main" xmlns:r="http://schemas.openxmlformats.org/officeDocument/2006/relationships" xmlns:p="http://schemas.openxmlformats.org/presentationml/2006/main" type="title" preserve="1">
   <p:cSld name="Címdia">
@@ -316,7 +2417,7 @@
           <a:p>
             <a:fld id="{D25B39C7-3761-4B48-AAEE-5F77047FB7CA}" type="datetimeFigureOut">
               <a:rPr lang="hu-HU" smtClean="0"/>
-              <a:t>2026. 02. 03.</a:t>
+              <a:t>2026. 02. 17.</a:t>
             </a:fld>
             <a:endParaRPr lang="hu-HU" dirty="0"/>
           </a:p>
@@ -614,7 +2715,7 @@
           <a:p>
             <a:fld id="{D25B39C7-3761-4B48-AAEE-5F77047FB7CA}" type="datetimeFigureOut">
               <a:rPr lang="hu-HU" smtClean="0"/>
-              <a:t>2026. 02. 03.</a:t>
+              <a:t>2026. 02. 17.</a:t>
             </a:fld>
             <a:endParaRPr lang="hu-HU" dirty="0"/>
           </a:p>
@@ -806,7 +2907,7 @@
           <a:p>
             <a:fld id="{D25B39C7-3761-4B48-AAEE-5F77047FB7CA}" type="datetimeFigureOut">
               <a:rPr lang="hu-HU" smtClean="0"/>
-              <a:t>2026. 02. 03.</a:t>
+              <a:t>2026. 02. 17.</a:t>
             </a:fld>
             <a:endParaRPr lang="hu-HU" dirty="0"/>
           </a:p>
@@ -1067,7 +3168,7 @@
           <a:p>
             <a:fld id="{D25B39C7-3761-4B48-AAEE-5F77047FB7CA}" type="datetimeFigureOut">
               <a:rPr lang="hu-HU" smtClean="0"/>
-              <a:t>2026. 02. 03.</a:t>
+              <a:t>2026. 02. 17.</a:t>
             </a:fld>
             <a:endParaRPr lang="hu-HU" dirty="0"/>
           </a:p>
@@ -1491,7 +3592,7 @@
           <a:p>
             <a:fld id="{D25B39C7-3761-4B48-AAEE-5F77047FB7CA}" type="datetimeFigureOut">
               <a:rPr lang="hu-HU" smtClean="0"/>
-              <a:t>2026. 02. 03.</a:t>
+              <a:t>2026. 02. 17.</a:t>
             </a:fld>
             <a:endParaRPr lang="hu-HU" dirty="0"/>
           </a:p>
@@ -2028,7 +4129,7 @@
           <a:p>
             <a:fld id="{D25B39C7-3761-4B48-AAEE-5F77047FB7CA}" type="datetimeFigureOut">
               <a:rPr lang="hu-HU" smtClean="0"/>
-              <a:t>2026. 02. 03.</a:t>
+              <a:t>2026. 02. 17.</a:t>
             </a:fld>
             <a:endParaRPr lang="hu-HU" dirty="0"/>
           </a:p>
@@ -2892,7 +4993,7 @@
           <a:p>
             <a:fld id="{D25B39C7-3761-4B48-AAEE-5F77047FB7CA}" type="datetimeFigureOut">
               <a:rPr lang="hu-HU" smtClean="0"/>
-              <a:t>2026. 02. 03.</a:t>
+              <a:t>2026. 02. 17.</a:t>
             </a:fld>
             <a:endParaRPr lang="hu-HU" dirty="0"/>
           </a:p>
@@ -3062,7 +5163,7 @@
           <a:p>
             <a:fld id="{D25B39C7-3761-4B48-AAEE-5F77047FB7CA}" type="datetimeFigureOut">
               <a:rPr lang="hu-HU" smtClean="0"/>
-              <a:t>2026. 02. 03.</a:t>
+              <a:t>2026. 02. 17.</a:t>
             </a:fld>
             <a:endParaRPr lang="hu-HU" dirty="0"/>
           </a:p>
@@ -3246,7 +5347,7 @@
           <a:p>
             <a:fld id="{D25B39C7-3761-4B48-AAEE-5F77047FB7CA}" type="datetimeFigureOut">
               <a:rPr lang="hu-HU" smtClean="0"/>
-              <a:t>2026. 02. 03.</a:t>
+              <a:t>2026. 02. 17.</a:t>
             </a:fld>
             <a:endParaRPr lang="hu-HU" dirty="0"/>
           </a:p>
@@ -3416,7 +5517,7 @@
           <a:p>
             <a:fld id="{D25B39C7-3761-4B48-AAEE-5F77047FB7CA}" type="datetimeFigureOut">
               <a:rPr lang="hu-HU" smtClean="0"/>
-              <a:t>2026. 02. 03.</a:t>
+              <a:t>2026. 02. 17.</a:t>
             </a:fld>
             <a:endParaRPr lang="hu-HU" dirty="0"/>
           </a:p>
@@ -3660,7 +5761,7 @@
           <a:p>
             <a:fld id="{D25B39C7-3761-4B48-AAEE-5F77047FB7CA}" type="datetimeFigureOut">
               <a:rPr lang="hu-HU" smtClean="0"/>
-              <a:t>2026. 02. 03.</a:t>
+              <a:t>2026. 02. 17.</a:t>
             </a:fld>
             <a:endParaRPr lang="hu-HU" dirty="0"/>
           </a:p>
@@ -3896,7 +5997,7 @@
           <a:p>
             <a:fld id="{D25B39C7-3761-4B48-AAEE-5F77047FB7CA}" type="datetimeFigureOut">
               <a:rPr lang="hu-HU" smtClean="0"/>
-              <a:t>2026. 02. 03.</a:t>
+              <a:t>2026. 02. 17.</a:t>
             </a:fld>
             <a:endParaRPr lang="hu-HU" dirty="0"/>
           </a:p>
@@ -4362,7 +6463,7 @@
           <a:p>
             <a:fld id="{D25B39C7-3761-4B48-AAEE-5F77047FB7CA}" type="datetimeFigureOut">
               <a:rPr lang="hu-HU" smtClean="0"/>
-              <a:t>2026. 02. 03.</a:t>
+              <a:t>2026. 02. 17.</a:t>
             </a:fld>
             <a:endParaRPr lang="hu-HU" dirty="0"/>
           </a:p>
@@ -4480,7 +6581,7 @@
           <a:p>
             <a:fld id="{D25B39C7-3761-4B48-AAEE-5F77047FB7CA}" type="datetimeFigureOut">
               <a:rPr lang="hu-HU" smtClean="0"/>
-              <a:t>2026. 02. 03.</a:t>
+              <a:t>2026. 02. 17.</a:t>
             </a:fld>
             <a:endParaRPr lang="hu-HU" dirty="0"/>
           </a:p>
@@ -4575,7 +6676,7 @@
           <a:p>
             <a:fld id="{D25B39C7-3761-4B48-AAEE-5F77047FB7CA}" type="datetimeFigureOut">
               <a:rPr lang="hu-HU" smtClean="0"/>
-              <a:t>2026. 02. 03.</a:t>
+              <a:t>2026. 02. 17.</a:t>
             </a:fld>
             <a:endParaRPr lang="hu-HU" dirty="0"/>
           </a:p>
@@ -4830,7 +6931,7 @@
           <a:p>
             <a:fld id="{D25B39C7-3761-4B48-AAEE-5F77047FB7CA}" type="datetimeFigureOut">
               <a:rPr lang="hu-HU" smtClean="0"/>
-              <a:t>2026. 02. 03.</a:t>
+              <a:t>2026. 02. 17.</a:t>
             </a:fld>
             <a:endParaRPr lang="hu-HU" dirty="0"/>
           </a:p>
@@ -5130,7 +7231,7 @@
           <a:p>
             <a:fld id="{D25B39C7-3761-4B48-AAEE-5F77047FB7CA}" type="datetimeFigureOut">
               <a:rPr lang="hu-HU" smtClean="0"/>
-              <a:t>2026. 02. 03.</a:t>
+              <a:t>2026. 02. 17.</a:t>
             </a:fld>
             <a:endParaRPr lang="hu-HU" dirty="0"/>
           </a:p>
@@ -5364,7 +7465,7 @@
           <a:p>
             <a:fld id="{D25B39C7-3761-4B48-AAEE-5F77047FB7CA}" type="datetimeFigureOut">
               <a:rPr lang="hu-HU" smtClean="0"/>
-              <a:t>2026. 02. 03.</a:t>
+              <a:t>2026. 02. 17.</a:t>
             </a:fld>
             <a:endParaRPr lang="hu-HU" dirty="0"/>
           </a:p>
@@ -6254,7 +8355,7 @@
           <p:nvPr/>
         </p:nvPicPr>
         <p:blipFill>
-          <a:blip r:embed="rId2"/>
+          <a:blip r:embed="rId3"/>
           <a:stretch>
             <a:fillRect/>
           </a:stretch>
@@ -6410,7 +8511,7 @@
           <p:nvPr/>
         </p:nvPicPr>
         <p:blipFill>
-          <a:blip r:embed="rId2"/>
+          <a:blip r:embed="rId3"/>
           <a:stretch>
             <a:fillRect/>
           </a:stretch>
@@ -6586,7 +8687,7 @@
           <p:nvPr/>
         </p:nvPicPr>
         <p:blipFill>
-          <a:blip r:embed="rId2"/>
+          <a:blip r:embed="rId3"/>
           <a:stretch>
             <a:fillRect/>
           </a:stretch>
@@ -6737,7 +8838,7 @@
           <p:nvPr/>
         </p:nvPicPr>
         <p:blipFill>
-          <a:blip r:embed="rId2"/>
+          <a:blip r:embed="rId3"/>
           <a:stretch>
             <a:fillRect/>
           </a:stretch>
@@ -6891,7 +8992,7 @@
           <p:nvPr/>
         </p:nvPicPr>
         <p:blipFill>
-          <a:blip r:embed="rId2"/>
+          <a:blip r:embed="rId3"/>
           <a:stretch>
             <a:fillRect/>
           </a:stretch>
@@ -7030,7 +9131,7 @@
           <p:nvPr/>
         </p:nvPicPr>
         <p:blipFill>
-          <a:blip r:embed="rId2">
+          <a:blip r:embed="rId3">
             <a:extLst>
               <a:ext uri="{28A0092B-C50C-407E-A947-70E740481C1C}">
                 <a14:useLocalDpi xmlns:a14="http://schemas.microsoft.com/office/drawing/2010/main"/>
@@ -7137,7 +9238,7 @@
           <p:nvPr/>
         </p:nvPicPr>
         <p:blipFill>
-          <a:blip r:embed="rId2"/>
+          <a:blip r:embed="rId3"/>
           <a:stretch>
             <a:fillRect/>
           </a:stretch>
@@ -7383,7 +9484,7 @@
           </p:nvPr>
         </p:nvPicPr>
         <p:blipFill>
-          <a:blip r:embed="rId2"/>
+          <a:blip r:embed="rId3"/>
           <a:stretch>
             <a:fillRect/>
           </a:stretch>
@@ -7413,7 +9514,7 @@
           <p:nvPr/>
         </p:nvPicPr>
         <p:blipFill>
-          <a:blip r:embed="rId3"/>
+          <a:blip r:embed="rId4"/>
           <a:stretch>
             <a:fillRect/>
           </a:stretch>
@@ -7443,7 +9544,7 @@
           <p:nvPr/>
         </p:nvPicPr>
         <p:blipFill>
-          <a:blip r:embed="rId4">
+          <a:blip r:embed="rId5">
             <a:extLst>
               <a:ext uri="{28A0092B-C50C-407E-A947-70E740481C1C}">
                 <a14:useLocalDpi xmlns:a14="http://schemas.microsoft.com/office/drawing/2010/main" val="0"/>
@@ -7590,6 +9691,230 @@
           <p:cNvPr id="2" name="Cím 1">
             <a:extLst>
               <a:ext uri="{FF2B5EF4-FFF2-40B4-BE49-F238E27FC236}">
+                <a16:creationId xmlns:a16="http://schemas.microsoft.com/office/drawing/2014/main" id="{FA1B43DE-5028-65E2-8566-203E5D037268}"/>
+              </a:ext>
+            </a:extLst>
+          </p:cNvPr>
+          <p:cNvSpPr>
+            <a:spLocks noGrp="1"/>
+          </p:cNvSpPr>
+          <p:nvPr>
+            <p:ph type="title"/>
+          </p:nvPr>
+        </p:nvSpPr>
+        <p:spPr/>
+        <p:txBody>
+          <a:bodyPr/>
+          <a:lstStyle/>
+          <a:p>
+            <a:r>
+              <a:rPr lang="hu-HU" dirty="0"/>
+              <a:t>Windows and Linux Server</a:t>
+            </a:r>
+          </a:p>
+        </p:txBody>
+      </p:sp>
+      <p:sp>
+        <p:nvSpPr>
+          <p:cNvPr id="4" name="Tartalom helye 3">
+            <a:extLst>
+              <a:ext uri="{FF2B5EF4-FFF2-40B4-BE49-F238E27FC236}">
+                <a16:creationId xmlns:a16="http://schemas.microsoft.com/office/drawing/2014/main" id="{2255C10A-648C-596F-ADB6-CD6C0AD54EBC}"/>
+              </a:ext>
+            </a:extLst>
+          </p:cNvPr>
+          <p:cNvSpPr>
+            <a:spLocks noGrp="1"/>
+          </p:cNvSpPr>
+          <p:nvPr>
+            <p:ph sz="half" idx="2"/>
+          </p:nvPr>
+        </p:nvSpPr>
+        <p:spPr>
+          <a:xfrm>
+            <a:off x="3558343" y="1713399"/>
+            <a:ext cx="5064665" cy="3074261"/>
+          </a:xfrm>
+        </p:spPr>
+        <p:txBody>
+          <a:bodyPr/>
+          <a:lstStyle/>
+          <a:p>
+            <a:pPr algn="ctr"/>
+            <a:r>
+              <a:rPr lang="hu-HU" dirty="0"/>
+              <a:t>DHCP</a:t>
+            </a:r>
+          </a:p>
+          <a:p>
+            <a:pPr algn="ctr"/>
+            <a:r>
+              <a:rPr lang="hu-HU" dirty="0"/>
+              <a:t>DNS</a:t>
+            </a:r>
+          </a:p>
+          <a:p>
+            <a:pPr algn="ctr"/>
+            <a:r>
+              <a:rPr lang="hu-HU" dirty="0"/>
+              <a:t>IIS</a:t>
+            </a:r>
+          </a:p>
+          <a:p>
+            <a:pPr algn="ctr"/>
+            <a:r>
+              <a:rPr lang="hu-HU" dirty="0"/>
+              <a:t>Active-Directory</a:t>
+            </a:r>
+          </a:p>
+          <a:p>
+            <a:pPr algn="ctr"/>
+            <a:r>
+              <a:rPr lang="hu-HU" dirty="0"/>
+              <a:t>Printer Szerver</a:t>
+            </a:r>
+          </a:p>
+          <a:p>
+            <a:pPr algn="ctr"/>
+            <a:r>
+              <a:rPr lang="hu-HU" dirty="0"/>
+              <a:t>Backup Szerver</a:t>
+            </a:r>
+          </a:p>
+          <a:p>
+            <a:pPr algn="ctr"/>
+            <a:r>
+              <a:rPr lang="hu-HU" dirty="0"/>
+              <a:t>Group Policy Management</a:t>
+            </a:r>
+          </a:p>
+        </p:txBody>
+      </p:sp>
+      <p:pic>
+        <p:nvPicPr>
+          <p:cNvPr id="5" name="Picture 2" descr="windows-server-logo">
+            <a:extLst>
+              <a:ext uri="{FF2B5EF4-FFF2-40B4-BE49-F238E27FC236}">
+                <a16:creationId xmlns:a16="http://schemas.microsoft.com/office/drawing/2014/main" id="{17032BB9-DF7E-F7DF-D9AB-87D626984140}"/>
+              </a:ext>
+            </a:extLst>
+          </p:cNvPr>
+          <p:cNvPicPr>
+            <a:picLocks noChangeAspect="1" noChangeArrowheads="1"/>
+          </p:cNvPicPr>
+          <p:nvPr/>
+        </p:nvPicPr>
+        <p:blipFill>
+          <a:blip r:embed="rId2">
+            <a:extLst>
+              <a:ext uri="{28A0092B-C50C-407E-A947-70E740481C1C}">
+                <a14:useLocalDpi xmlns:a14="http://schemas.microsoft.com/office/drawing/2010/main" val="0"/>
+              </a:ext>
+            </a:extLst>
+          </a:blip>
+          <a:srcRect/>
+          <a:stretch>
+            <a:fillRect/>
+          </a:stretch>
+        </p:blipFill>
+        <p:spPr bwMode="auto">
+          <a:xfrm>
+            <a:off x="1425462" y="4556408"/>
+            <a:ext cx="4037162" cy="2134754"/>
+          </a:xfrm>
+          <a:prstGeom prst="rect">
+            <a:avLst/>
+          </a:prstGeom>
+          <a:noFill/>
+          <a:extLst>
+            <a:ext uri="{909E8E84-426E-40DD-AFC4-6F175D3DCCD1}">
+              <a14:hiddenFill xmlns:a14="http://schemas.microsoft.com/office/drawing/2010/main">
+                <a:solidFill>
+                  <a:srgbClr val="FFFFFF"/>
+                </a:solidFill>
+              </a14:hiddenFill>
+            </a:ext>
+          </a:extLst>
+        </p:spPr>
+      </p:pic>
+      <p:pic>
+        <p:nvPicPr>
+          <p:cNvPr id="6" name="Tartalom helye 16" descr="A képen művészet, kör, Grafika, Színesség látható&#10;&#10;Előfordulhat, hogy a mesterséges intelligencia által létrehozott tartalom helytelen.">
+            <a:extLst>
+              <a:ext uri="{FF2B5EF4-FFF2-40B4-BE49-F238E27FC236}">
+                <a16:creationId xmlns:a16="http://schemas.microsoft.com/office/drawing/2014/main" id="{58698F6D-72D8-5BAA-F308-1A4CC58F244F}"/>
+              </a:ext>
+            </a:extLst>
+          </p:cNvPr>
+          <p:cNvPicPr>
+            <a:picLocks noChangeAspect="1"/>
+          </p:cNvPicPr>
+          <p:nvPr/>
+        </p:nvPicPr>
+        <p:blipFill>
+          <a:blip r:embed="rId3">
+            <a:extLst>
+              <a:ext uri="{28A0092B-C50C-407E-A947-70E740481C1C}">
+                <a14:useLocalDpi xmlns:a14="http://schemas.microsoft.com/office/drawing/2010/main" val="0"/>
+              </a:ext>
+            </a:extLst>
+          </a:blip>
+          <a:stretch>
+            <a:fillRect/>
+          </a:stretch>
+        </p:blipFill>
+        <p:spPr>
+          <a:xfrm>
+            <a:off x="7977434" y="4594508"/>
+            <a:ext cx="1951570" cy="2134754"/>
+          </a:xfrm>
+          <a:prstGeom prst="rect">
+            <a:avLst/>
+          </a:prstGeom>
+          <a:effectLst>
+            <a:outerShdw blurRad="25400" dir="17880000">
+              <a:srgbClr val="000000">
+                <a:alpha val="46000"/>
+              </a:srgbClr>
+            </a:outerShdw>
+          </a:effectLst>
+        </p:spPr>
+      </p:pic>
+    </p:spTree>
+    <p:extLst>
+      <p:ext uri="{BB962C8B-B14F-4D97-AF65-F5344CB8AC3E}">
+        <p14:creationId xmlns:p14="http://schemas.microsoft.com/office/powerpoint/2010/main" val="1273468344"/>
+      </p:ext>
+    </p:extLst>
+  </p:cSld>
+  <p:clrMapOvr>
+    <a:masterClrMapping/>
+  </p:clrMapOvr>
+</p:sld>
+</file>
+
+<file path=ppt/slides/slide19.xml><?xml version="1.0" encoding="utf-8"?>
+<p:sld xmlns:a="http://schemas.openxmlformats.org/drawingml/2006/main" xmlns:r="http://schemas.openxmlformats.org/officeDocument/2006/relationships" xmlns:p="http://schemas.openxmlformats.org/presentationml/2006/main">
+  <p:cSld>
+    <p:spTree>
+      <p:nvGrpSpPr>
+        <p:cNvPr id="1" name=""/>
+        <p:cNvGrpSpPr/>
+        <p:nvPr/>
+      </p:nvGrpSpPr>
+      <p:grpSpPr>
+        <a:xfrm>
+          <a:off x="0" y="0"/>
+          <a:ext cx="0" cy="0"/>
+          <a:chOff x="0" y="0"/>
+          <a:chExt cx="0" cy="0"/>
+        </a:xfrm>
+      </p:grpSpPr>
+      <p:sp>
+        <p:nvSpPr>
+          <p:cNvPr id="2" name="Cím 1">
+            <a:extLst>
+              <a:ext uri="{FF2B5EF4-FFF2-40B4-BE49-F238E27FC236}">
                 <a16:creationId xmlns:a16="http://schemas.microsoft.com/office/drawing/2014/main" id="{53817A90-70AB-88FD-8997-FAE17BD069D6}"/>
               </a:ext>
             </a:extLst>
@@ -7879,7 +10204,7 @@
           <p:nvPr/>
         </p:nvPicPr>
         <p:blipFill>
-          <a:blip r:embed="rId2"/>
+          <a:blip r:embed="rId3"/>
           <a:stretch>
             <a:fillRect/>
           </a:stretch>
@@ -7909,7 +10234,7 @@
           <p:nvPr/>
         </p:nvPicPr>
         <p:blipFill>
-          <a:blip r:embed="rId3"/>
+          <a:blip r:embed="rId4"/>
           <a:stretch>
             <a:fillRect/>
           </a:stretch>
@@ -7939,7 +10264,7 @@
           <p:nvPr/>
         </p:nvPicPr>
         <p:blipFill>
-          <a:blip r:embed="rId4"/>
+          <a:blip r:embed="rId5"/>
           <a:stretch>
             <a:fillRect/>
           </a:stretch>
@@ -7969,7 +10294,7 @@
           <p:nvPr/>
         </p:nvPicPr>
         <p:blipFill>
-          <a:blip r:embed="rId5"/>
+          <a:blip r:embed="rId6"/>
           <a:stretch>
             <a:fillRect/>
           </a:stretch>
@@ -8000,101 +10325,6 @@
 </p:sld>
 </file>
 
-<file path=ppt/slides/slide19.xml><?xml version="1.0" encoding="utf-8"?>
-<p:sld xmlns:a="http://schemas.openxmlformats.org/drawingml/2006/main" xmlns:r="http://schemas.openxmlformats.org/officeDocument/2006/relationships" xmlns:p="http://schemas.openxmlformats.org/presentationml/2006/main">
-  <p:cSld>
-    <p:spTree>
-      <p:nvGrpSpPr>
-        <p:cNvPr id="1" name=""/>
-        <p:cNvGrpSpPr/>
-        <p:nvPr/>
-      </p:nvGrpSpPr>
-      <p:grpSpPr>
-        <a:xfrm>
-          <a:off x="0" y="0"/>
-          <a:ext cx="0" cy="0"/>
-          <a:chOff x="0" y="0"/>
-          <a:chExt cx="0" cy="0"/>
-        </a:xfrm>
-      </p:grpSpPr>
-      <p:sp>
-        <p:nvSpPr>
-          <p:cNvPr id="2" name="Cím 1">
-            <a:extLst>
-              <a:ext uri="{FF2B5EF4-FFF2-40B4-BE49-F238E27FC236}">
-                <a16:creationId xmlns:a16="http://schemas.microsoft.com/office/drawing/2014/main" id="{257AB2B2-57D3-A109-613B-792764AA5294}"/>
-              </a:ext>
-            </a:extLst>
-          </p:cNvPr>
-          <p:cNvSpPr>
-            <a:spLocks noGrp="1"/>
-          </p:cNvSpPr>
-          <p:nvPr>
-            <p:ph type="title"/>
-          </p:nvPr>
-        </p:nvSpPr>
-        <p:spPr/>
-        <p:txBody>
-          <a:bodyPr/>
-          <a:lstStyle/>
-          <a:p>
-            <a:pPr algn="ctr"/>
-            <a:r>
-              <a:rPr lang="hu-HU" dirty="0">
-                <a:solidFill>
-                  <a:schemeClr val="tx1"/>
-                </a:solidFill>
-              </a:rPr>
-              <a:t>Work Distribution</a:t>
-            </a:r>
-          </a:p>
-        </p:txBody>
-      </p:sp>
-      <p:pic>
-        <p:nvPicPr>
-          <p:cNvPr id="7" name="Kép 6">
-            <a:extLst>
-              <a:ext uri="{FF2B5EF4-FFF2-40B4-BE49-F238E27FC236}">
-                <a16:creationId xmlns:a16="http://schemas.microsoft.com/office/drawing/2014/main" id="{A736794A-A1C3-1C84-3D27-0ADA8C681D39}"/>
-              </a:ext>
-            </a:extLst>
-          </p:cNvPr>
-          <p:cNvPicPr>
-            <a:picLocks noChangeAspect="1"/>
-          </p:cNvPicPr>
-          <p:nvPr/>
-        </p:nvPicPr>
-        <p:blipFill>
-          <a:blip r:embed="rId2"/>
-          <a:srcRect t="4680"/>
-          <a:stretch/>
-        </p:blipFill>
-        <p:spPr>
-          <a:xfrm>
-            <a:off x="991783" y="1803628"/>
-            <a:ext cx="10197786" cy="4562666"/>
-          </a:xfrm>
-          <a:prstGeom prst="rect">
-            <a:avLst/>
-          </a:prstGeom>
-        </p:spPr>
-      </p:pic>
-    </p:spTree>
-    <p:extLst>
-      <p:ext uri="{BB962C8B-B14F-4D97-AF65-F5344CB8AC3E}">
-        <p14:creationId xmlns:p14="http://schemas.microsoft.com/office/powerpoint/2010/main" val="3928631734"/>
-      </p:ext>
-    </p:extLst>
-  </p:cSld>
-  <p:clrMapOvr>
-    <a:masterClrMapping/>
-  </p:clrMapOvr>
-  <p:transition spd="slow">
-    <p:push dir="u"/>
-  </p:transition>
-</p:sld>
-</file>
-
 <file path=ppt/slides/slide2.xml><?xml version="1.0" encoding="utf-8"?>
 <p:sld xmlns:a="http://schemas.openxmlformats.org/drawingml/2006/main" xmlns:r="http://schemas.openxmlformats.org/officeDocument/2006/relationships" xmlns:p="http://schemas.openxmlformats.org/presentationml/2006/main">
   <p:cSld>
@@ -8226,7 +10456,7 @@
           <p:nvPr/>
         </p:nvPicPr>
         <p:blipFill>
-          <a:blip r:embed="rId2">
+          <a:blip r:embed="rId3">
             <a:extLst>
               <a:ext uri="{28A0092B-C50C-407E-A947-70E740481C1C}">
                 <a14:useLocalDpi xmlns:a14="http://schemas.microsoft.com/office/drawing/2010/main" val="0"/>
@@ -8276,7 +10506,7 @@
           <p:nvPr/>
         </p:nvPicPr>
         <p:blipFill>
-          <a:blip r:embed="rId3">
+          <a:blip r:embed="rId4">
             <a:extLst>
               <a:ext uri="{28A0092B-C50C-407E-A947-70E740481C1C}">
                 <a14:useLocalDpi xmlns:a14="http://schemas.microsoft.com/office/drawing/2010/main" val="0"/>
@@ -8337,6 +10567,101 @@
           <p:cNvPr id="2" name="Cím 1">
             <a:extLst>
               <a:ext uri="{FF2B5EF4-FFF2-40B4-BE49-F238E27FC236}">
+                <a16:creationId xmlns:a16="http://schemas.microsoft.com/office/drawing/2014/main" id="{257AB2B2-57D3-A109-613B-792764AA5294}"/>
+              </a:ext>
+            </a:extLst>
+          </p:cNvPr>
+          <p:cNvSpPr>
+            <a:spLocks noGrp="1"/>
+          </p:cNvSpPr>
+          <p:nvPr>
+            <p:ph type="title"/>
+          </p:nvPr>
+        </p:nvSpPr>
+        <p:spPr/>
+        <p:txBody>
+          <a:bodyPr/>
+          <a:lstStyle/>
+          <a:p>
+            <a:pPr algn="ctr"/>
+            <a:r>
+              <a:rPr lang="hu-HU" dirty="0">
+                <a:solidFill>
+                  <a:schemeClr val="tx1"/>
+                </a:solidFill>
+              </a:rPr>
+              <a:t>Work Distribution</a:t>
+            </a:r>
+          </a:p>
+        </p:txBody>
+      </p:sp>
+      <p:pic>
+        <p:nvPicPr>
+          <p:cNvPr id="7" name="Kép 6">
+            <a:extLst>
+              <a:ext uri="{FF2B5EF4-FFF2-40B4-BE49-F238E27FC236}">
+                <a16:creationId xmlns:a16="http://schemas.microsoft.com/office/drawing/2014/main" id="{A736794A-A1C3-1C84-3D27-0ADA8C681D39}"/>
+              </a:ext>
+            </a:extLst>
+          </p:cNvPr>
+          <p:cNvPicPr>
+            <a:picLocks noChangeAspect="1"/>
+          </p:cNvPicPr>
+          <p:nvPr/>
+        </p:nvPicPr>
+        <p:blipFill>
+          <a:blip r:embed="rId3"/>
+          <a:srcRect t="4680"/>
+          <a:stretch/>
+        </p:blipFill>
+        <p:spPr>
+          <a:xfrm>
+            <a:off x="991783" y="1803628"/>
+            <a:ext cx="10197786" cy="4562666"/>
+          </a:xfrm>
+          <a:prstGeom prst="rect">
+            <a:avLst/>
+          </a:prstGeom>
+        </p:spPr>
+      </p:pic>
+    </p:spTree>
+    <p:extLst>
+      <p:ext uri="{BB962C8B-B14F-4D97-AF65-F5344CB8AC3E}">
+        <p14:creationId xmlns:p14="http://schemas.microsoft.com/office/powerpoint/2010/main" val="3928631734"/>
+      </p:ext>
+    </p:extLst>
+  </p:cSld>
+  <p:clrMapOvr>
+    <a:masterClrMapping/>
+  </p:clrMapOvr>
+  <p:transition spd="slow">
+    <p:push dir="u"/>
+  </p:transition>
+</p:sld>
+</file>
+
+<file path=ppt/slides/slide21.xml><?xml version="1.0" encoding="utf-8"?>
+<p:sld xmlns:a="http://schemas.openxmlformats.org/drawingml/2006/main" xmlns:r="http://schemas.openxmlformats.org/officeDocument/2006/relationships" xmlns:p="http://schemas.openxmlformats.org/presentationml/2006/main">
+  <p:cSld>
+    <p:spTree>
+      <p:nvGrpSpPr>
+        <p:cNvPr id="1" name=""/>
+        <p:cNvGrpSpPr/>
+        <p:nvPr/>
+      </p:nvGrpSpPr>
+      <p:grpSpPr>
+        <a:xfrm>
+          <a:off x="0" y="0"/>
+          <a:ext cx="0" cy="0"/>
+          <a:chOff x="0" y="0"/>
+          <a:chExt cx="0" cy="0"/>
+        </a:xfrm>
+      </p:grpSpPr>
+      <p:sp>
+        <p:nvSpPr>
+          <p:cNvPr id="2" name="Cím 1">
+            <a:extLst>
+              <a:ext uri="{FF2B5EF4-FFF2-40B4-BE49-F238E27FC236}">
                 <a16:creationId xmlns:a16="http://schemas.microsoft.com/office/drawing/2014/main" id="{E2F14126-DC72-2F50-D80B-DDD36B6568AC}"/>
               </a:ext>
             </a:extLst>
@@ -8677,7 +11002,7 @@
           <p:nvPr/>
         </p:nvPicPr>
         <p:blipFill>
-          <a:blip r:embed="rId2">
+          <a:blip r:embed="rId3">
             <a:extLst>
               <a:ext uri="{28A0092B-C50C-407E-A947-70E740481C1C}">
                 <a14:useLocalDpi xmlns:a14="http://schemas.microsoft.com/office/drawing/2010/main"/>
@@ -8878,7 +11203,7 @@
           <p:nvPr/>
         </p:nvPicPr>
         <p:blipFill>
-          <a:blip r:embed="rId2"/>
+          <a:blip r:embed="rId3"/>
           <a:stretch>
             <a:fillRect/>
           </a:stretch>
@@ -9070,7 +11395,7 @@
           <p:nvPr/>
         </p:nvPicPr>
         <p:blipFill>
-          <a:blip r:embed="rId2"/>
+          <a:blip r:embed="rId3"/>
           <a:stretch>
             <a:fillRect/>
           </a:stretch>
@@ -9220,7 +11545,7 @@
           <p:nvPr/>
         </p:nvPicPr>
         <p:blipFill>
-          <a:blip r:embed="rId2"/>
+          <a:blip r:embed="rId3"/>
           <a:stretch>
             <a:fillRect/>
           </a:stretch>
@@ -9413,7 +11738,7 @@
           <p:nvPr/>
         </p:nvPicPr>
         <p:blipFill>
-          <a:blip r:embed="rId2"/>
+          <a:blip r:embed="rId3"/>
           <a:stretch>
             <a:fillRect/>
           </a:stretch>
@@ -9583,7 +11908,7 @@
           <p:nvPr/>
         </p:nvPicPr>
         <p:blipFill>
-          <a:blip r:embed="rId2"/>
+          <a:blip r:embed="rId3"/>
           <a:stretch>
             <a:fillRect/>
           </a:stretch>
@@ -9854,4 +12179,319 @@
     </a:ext>
   </a:extLst>
 </a:theme>
+</file>
+
+<file path=ppt/theme/theme2.xml><?xml version="1.0" encoding="utf-8"?>
+<a:theme xmlns:a="http://schemas.openxmlformats.org/drawingml/2006/main" name="Office-téma">
+  <a:themeElements>
+    <a:clrScheme name="Office">
+      <a:dk1>
+        <a:sysClr val="windowText" lastClr="000000"/>
+      </a:dk1>
+      <a:lt1>
+        <a:sysClr val="window" lastClr="FFFFFF"/>
+      </a:lt1>
+      <a:dk2>
+        <a:srgbClr val="0E2841"/>
+      </a:dk2>
+      <a:lt2>
+        <a:srgbClr val="E8E8E8"/>
+      </a:lt2>
+      <a:accent1>
+        <a:srgbClr val="156082"/>
+      </a:accent1>
+      <a:accent2>
+        <a:srgbClr val="E97132"/>
+      </a:accent2>
+      <a:accent3>
+        <a:srgbClr val="196B24"/>
+      </a:accent3>
+      <a:accent4>
+        <a:srgbClr val="0F9ED5"/>
+      </a:accent4>
+      <a:accent5>
+        <a:srgbClr val="A02B93"/>
+      </a:accent5>
+      <a:accent6>
+        <a:srgbClr val="4EA72E"/>
+      </a:accent6>
+      <a:hlink>
+        <a:srgbClr val="467886"/>
+      </a:hlink>
+      <a:folHlink>
+        <a:srgbClr val="96607D"/>
+      </a:folHlink>
+    </a:clrScheme>
+    <a:fontScheme name="Office">
+      <a:majorFont>
+        <a:latin typeface="Aptos Display" panose="02110004020202020204"/>
+        <a:ea typeface=""/>
+        <a:cs typeface=""/>
+        <a:font script="Jpan" typeface="游ゴシック Light"/>
+        <a:font script="Hang" typeface="맑은 고딕"/>
+        <a:font script="Hans" typeface="等线 Light"/>
+        <a:font script="Hant" typeface="新細明體"/>
+        <a:font script="Arab" typeface="Times New Roman"/>
+        <a:font script="Hebr" typeface="Times New Roman"/>
+        <a:font script="Thai" typeface="Angsana New"/>
+        <a:font script="Ethi" typeface="Nyala"/>
+        <a:font script="Beng" typeface="Vrinda"/>
+        <a:font script="Gujr" typeface="Shruti"/>
+        <a:font script="Khmr" typeface="MoolBoran"/>
+        <a:font script="Knda" typeface="Tunga"/>
+        <a:font script="Guru" typeface="Raavi"/>
+        <a:font script="Cans" typeface="Euphemia"/>
+        <a:font script="Cher" typeface="Plantagenet Cherokee"/>
+        <a:font script="Yiii" typeface="Microsoft Yi Baiti"/>
+        <a:font script="Tibt" typeface="Microsoft Himalaya"/>
+        <a:font script="Thaa" typeface="MV Boli"/>
+        <a:font script="Deva" typeface="Mangal"/>
+        <a:font script="Telu" typeface="Gautami"/>
+        <a:font script="Taml" typeface="Latha"/>
+        <a:font script="Syrc" typeface="Estrangelo Edessa"/>
+        <a:font script="Orya" typeface="Kalinga"/>
+        <a:font script="Mlym" typeface="Kartika"/>
+        <a:font script="Laoo" typeface="DokChampa"/>
+        <a:font script="Sinh" typeface="Iskoola Pota"/>
+        <a:font script="Mong" typeface="Mongolian Baiti"/>
+        <a:font script="Viet" typeface="Times New Roman"/>
+        <a:font script="Uigh" typeface="Microsoft Uighur"/>
+        <a:font script="Geor" typeface="Sylfaen"/>
+        <a:font script="Armn" typeface="Arial"/>
+        <a:font script="Bugi" typeface="Leelawadee UI"/>
+        <a:font script="Bopo" typeface="Microsoft JhengHei"/>
+        <a:font script="Java" typeface="Javanese Text"/>
+        <a:font script="Lisu" typeface="Segoe UI"/>
+        <a:font script="Mymr" typeface="Myanmar Text"/>
+        <a:font script="Nkoo" typeface="Ebrima"/>
+        <a:font script="Olck" typeface="Nirmala UI"/>
+        <a:font script="Osma" typeface="Ebrima"/>
+        <a:font script="Phag" typeface="Phagspa"/>
+        <a:font script="Syrn" typeface="Estrangelo Edessa"/>
+        <a:font script="Syrj" typeface="Estrangelo Edessa"/>
+        <a:font script="Syre" typeface="Estrangelo Edessa"/>
+        <a:font script="Sora" typeface="Nirmala UI"/>
+        <a:font script="Tale" typeface="Microsoft Tai Le"/>
+        <a:font script="Talu" typeface="Microsoft New Tai Lue"/>
+        <a:font script="Tfng" typeface="Ebrima"/>
+      </a:majorFont>
+      <a:minorFont>
+        <a:latin typeface="Aptos" panose="02110004020202020204"/>
+        <a:ea typeface=""/>
+        <a:cs typeface=""/>
+        <a:font script="Jpan" typeface="游ゴシック"/>
+        <a:font script="Hang" typeface="맑은 고딕"/>
+        <a:font script="Hans" typeface="等线"/>
+        <a:font script="Hant" typeface="新細明體"/>
+        <a:font script="Arab" typeface="Arial"/>
+        <a:font script="Hebr" typeface="Arial"/>
+        <a:font script="Thai" typeface="Cordia New"/>
+        <a:font script="Ethi" typeface="Nyala"/>
+        <a:font script="Beng" typeface="Vrinda"/>
+        <a:font script="Gujr" typeface="Shruti"/>
+        <a:font script="Khmr" typeface="DaunPenh"/>
+        <a:font script="Knda" typeface="Tunga"/>
+        <a:font script="Guru" typeface="Raavi"/>
+        <a:font script="Cans" typeface="Euphemia"/>
+        <a:font script="Cher" typeface="Plantagenet Cherokee"/>
+        <a:font script="Yiii" typeface="Microsoft Yi Baiti"/>
+        <a:font script="Tibt" typeface="Microsoft Himalaya"/>
+        <a:font script="Thaa" typeface="MV Boli"/>
+        <a:font script="Deva" typeface="Mangal"/>
+        <a:font script="Telu" typeface="Gautami"/>
+        <a:font script="Taml" typeface="Latha"/>
+        <a:font script="Syrc" typeface="Estrangelo Edessa"/>
+        <a:font script="Orya" typeface="Kalinga"/>
+        <a:font script="Mlym" typeface="Kartika"/>
+        <a:font script="Laoo" typeface="DokChampa"/>
+        <a:font script="Sinh" typeface="Iskoola Pota"/>
+        <a:font script="Mong" typeface="Mongolian Baiti"/>
+        <a:font script="Viet" typeface="Arial"/>
+        <a:font script="Uigh" typeface="Microsoft Uighur"/>
+        <a:font script="Geor" typeface="Sylfaen"/>
+        <a:font script="Armn" typeface="Arial"/>
+        <a:font script="Bugi" typeface="Leelawadee UI"/>
+        <a:font script="Bopo" typeface="Microsoft JhengHei"/>
+        <a:font script="Java" typeface="Javanese Text"/>
+        <a:font script="Lisu" typeface="Segoe UI"/>
+        <a:font script="Mymr" typeface="Myanmar Text"/>
+        <a:font script="Nkoo" typeface="Ebrima"/>
+        <a:font script="Olck" typeface="Nirmala UI"/>
+        <a:font script="Osma" typeface="Ebrima"/>
+        <a:font script="Phag" typeface="Phagspa"/>
+        <a:font script="Syrn" typeface="Estrangelo Edessa"/>
+        <a:font script="Syrj" typeface="Estrangelo Edessa"/>
+        <a:font script="Syre" typeface="Estrangelo Edessa"/>
+        <a:font script="Sora" typeface="Nirmala UI"/>
+        <a:font script="Tale" typeface="Microsoft Tai Le"/>
+        <a:font script="Talu" typeface="Microsoft New Tai Lue"/>
+        <a:font script="Tfng" typeface="Ebrima"/>
+      </a:minorFont>
+    </a:fontScheme>
+    <a:fmtScheme name="Office">
+      <a:fillStyleLst>
+        <a:solidFill>
+          <a:schemeClr val="phClr"/>
+        </a:solidFill>
+        <a:gradFill rotWithShape="1">
+          <a:gsLst>
+            <a:gs pos="0">
+              <a:schemeClr val="phClr">
+                <a:lumMod val="110000"/>
+                <a:satMod val="105000"/>
+                <a:tint val="67000"/>
+              </a:schemeClr>
+            </a:gs>
+            <a:gs pos="50000">
+              <a:schemeClr val="phClr">
+                <a:lumMod val="105000"/>
+                <a:satMod val="103000"/>
+                <a:tint val="73000"/>
+              </a:schemeClr>
+            </a:gs>
+            <a:gs pos="100000">
+              <a:schemeClr val="phClr">
+                <a:lumMod val="105000"/>
+                <a:satMod val="109000"/>
+                <a:tint val="81000"/>
+              </a:schemeClr>
+            </a:gs>
+          </a:gsLst>
+          <a:lin ang="5400000" scaled="0"/>
+        </a:gradFill>
+        <a:gradFill rotWithShape="1">
+          <a:gsLst>
+            <a:gs pos="0">
+              <a:schemeClr val="phClr">
+                <a:satMod val="103000"/>
+                <a:lumMod val="102000"/>
+                <a:tint val="94000"/>
+              </a:schemeClr>
+            </a:gs>
+            <a:gs pos="50000">
+              <a:schemeClr val="phClr">
+                <a:satMod val="110000"/>
+                <a:lumMod val="100000"/>
+                <a:shade val="100000"/>
+              </a:schemeClr>
+            </a:gs>
+            <a:gs pos="100000">
+              <a:schemeClr val="phClr">
+                <a:lumMod val="99000"/>
+                <a:satMod val="120000"/>
+                <a:shade val="78000"/>
+              </a:schemeClr>
+            </a:gs>
+          </a:gsLst>
+          <a:lin ang="5400000" scaled="0"/>
+        </a:gradFill>
+      </a:fillStyleLst>
+      <a:lnStyleLst>
+        <a:ln w="12700" cap="flat" cmpd="sng" algn="ctr">
+          <a:solidFill>
+            <a:schemeClr val="phClr"/>
+          </a:solidFill>
+          <a:prstDash val="solid"/>
+          <a:miter lim="800000"/>
+        </a:ln>
+        <a:ln w="19050" cap="flat" cmpd="sng" algn="ctr">
+          <a:solidFill>
+            <a:schemeClr val="phClr"/>
+          </a:solidFill>
+          <a:prstDash val="solid"/>
+          <a:miter lim="800000"/>
+        </a:ln>
+        <a:ln w="25400" cap="flat" cmpd="sng" algn="ctr">
+          <a:solidFill>
+            <a:schemeClr val="phClr"/>
+          </a:solidFill>
+          <a:prstDash val="solid"/>
+          <a:miter lim="800000"/>
+        </a:ln>
+      </a:lnStyleLst>
+      <a:effectStyleLst>
+        <a:effectStyle>
+          <a:effectLst/>
+        </a:effectStyle>
+        <a:effectStyle>
+          <a:effectLst/>
+        </a:effectStyle>
+        <a:effectStyle>
+          <a:effectLst>
+            <a:outerShdw blurRad="57150" dist="19050" dir="5400000" algn="ctr" rotWithShape="0">
+              <a:srgbClr val="000000">
+                <a:alpha val="63000"/>
+              </a:srgbClr>
+            </a:outerShdw>
+          </a:effectLst>
+        </a:effectStyle>
+      </a:effectStyleLst>
+      <a:bgFillStyleLst>
+        <a:solidFill>
+          <a:schemeClr val="phClr"/>
+        </a:solidFill>
+        <a:solidFill>
+          <a:schemeClr val="phClr">
+            <a:tint val="95000"/>
+            <a:satMod val="170000"/>
+          </a:schemeClr>
+        </a:solidFill>
+        <a:gradFill rotWithShape="1">
+          <a:gsLst>
+            <a:gs pos="0">
+              <a:schemeClr val="phClr">
+                <a:tint val="93000"/>
+                <a:satMod val="150000"/>
+                <a:shade val="98000"/>
+                <a:lumMod val="102000"/>
+              </a:schemeClr>
+            </a:gs>
+            <a:gs pos="50000">
+              <a:schemeClr val="phClr">
+                <a:tint val="98000"/>
+                <a:satMod val="130000"/>
+                <a:shade val="90000"/>
+                <a:lumMod val="103000"/>
+              </a:schemeClr>
+            </a:gs>
+            <a:gs pos="100000">
+              <a:schemeClr val="phClr">
+                <a:shade val="63000"/>
+                <a:satMod val="120000"/>
+              </a:schemeClr>
+            </a:gs>
+          </a:gsLst>
+          <a:lin ang="5400000" scaled="0"/>
+        </a:gradFill>
+      </a:bgFillStyleLst>
+    </a:fmtScheme>
+  </a:themeElements>
+  <a:objectDefaults>
+    <a:lnDef>
+      <a:spPr/>
+      <a:bodyPr/>
+      <a:lstStyle/>
+      <a:style>
+        <a:lnRef idx="2">
+          <a:schemeClr val="accent1"/>
+        </a:lnRef>
+        <a:fillRef idx="0">
+          <a:schemeClr val="accent1"/>
+        </a:fillRef>
+        <a:effectRef idx="1">
+          <a:schemeClr val="accent1"/>
+        </a:effectRef>
+        <a:fontRef idx="minor">
+          <a:schemeClr val="tx1"/>
+        </a:fontRef>
+      </a:style>
+    </a:lnDef>
+  </a:objectDefaults>
+  <a:extraClrSchemeLst/>
+  <a:extLst>
+    <a:ext uri="{05A4C25C-085E-4340-85A3-A5531E510DB2}">
+      <thm15:themeFamily xmlns:thm15="http://schemas.microsoft.com/office/thememl/2012/main" name="Office Theme" id="{2E142A2C-CD16-42D6-873A-C26D2A0506FA}" vid="{1BDDFF52-6CD6-40A5-AB3C-68EB2F1E4D0A}"/>
+    </a:ext>
+  </a:extLst>
+</a:theme>
 </file>